--- a/OmniSign_3D_Phase1_Official_Template.pptx
+++ b/OmniSign_3D_Phase1_Official_Template.pptx
@@ -5,23 +5,23 @@
     <p:sldMasterId id="2147483648" r:id="rId1"/>
   </p:sldMasterIdLst>
   <p:sldIdLst>
-    <p:sldId id="256" r:id="rId7"/>
-    <p:sldId id="257" r:id="rId8"/>
-    <p:sldId id="258" r:id="rId9"/>
-    <p:sldId id="259" r:id="rId10"/>
-    <p:sldId id="260" r:id="rId11"/>
-    <p:sldId id="261" r:id="rId12"/>
-    <p:sldId id="262" r:id="rId13"/>
-    <p:sldId id="263" r:id="rId14"/>
-    <p:sldId id="264" r:id="rId15"/>
-    <p:sldId id="265" r:id="rId16"/>
-    <p:sldId id="266" r:id="rId17"/>
-    <p:sldId id="267" r:id="rId18"/>
-    <p:sldId id="268" r:id="rId19"/>
-    <p:sldId id="269" r:id="rId20"/>
-    <p:sldId id="270" r:id="rId21"/>
-    <p:sldId id="271" r:id="rId22"/>
-    <p:sldId id="272" r:id="rId23"/>
+    <p:sldId id="256" r:id="rId2"/>
+    <p:sldId id="257" r:id="rId3"/>
+    <p:sldId id="258" r:id="rId4"/>
+    <p:sldId id="259" r:id="rId5"/>
+    <p:sldId id="260" r:id="rId6"/>
+    <p:sldId id="261" r:id="rId7"/>
+    <p:sldId id="262" r:id="rId8"/>
+    <p:sldId id="263" r:id="rId9"/>
+    <p:sldId id="264" r:id="rId10"/>
+    <p:sldId id="265" r:id="rId11"/>
+    <p:sldId id="266" r:id="rId12"/>
+    <p:sldId id="267" r:id="rId13"/>
+    <p:sldId id="268" r:id="rId14"/>
+    <p:sldId id="269" r:id="rId15"/>
+    <p:sldId id="270" r:id="rId16"/>
+    <p:sldId id="271" r:id="rId17"/>
+    <p:sldId id="272" r:id="rId18"/>
   </p:sldIdLst>
   <p:sldSz cx="9144000" cy="6858000" type="screen4x3"/>
   <p:notesSz cx="6858000" cy="9144000"/>
@@ -120,6 +120,22 @@
       </a:defRPr>
     </a:lvl9pPr>
   </p:defaultTextStyle>
+  <p:extLst>
+    <p:ext uri="{EFAFB233-063F-42B5-8137-9DF3F51BA10A}">
+      <p15:sldGuideLst xmlns:p15="http://schemas.microsoft.com/office/powerpoint/2012/main">
+        <p15:guide id="1" orient="horz" pos="2160">
+          <p15:clr>
+            <a:srgbClr val="A4A3A4"/>
+          </p15:clr>
+        </p15:guide>
+        <p15:guide id="2" pos="2880">
+          <p15:clr>
+            <a:srgbClr val="A4A3A4"/>
+          </p15:clr>
+        </p15:guide>
+      </p15:sldGuideLst>
+    </p:ext>
+  </p:extLst>
 </p:presentation>
 </file>
 
@@ -161,10 +177,9 @@
           <a:lstStyle/>
           <a:p>
             <a:r>
-              <a:rPr lang="en-US" smtClean="0"/>
+              <a:rPr lang="en-US"/>
               <a:t>Click to edit Master title style</a:t>
             </a:r>
-            <a:endParaRPr lang="en-US"/>
           </a:p>
         </p:txBody>
       </p:sp>
@@ -280,10 +295,9 @@
           </a:lstStyle>
           <a:p>
             <a:r>
-              <a:rPr lang="en-US" smtClean="0"/>
+              <a:rPr lang="en-US"/>
               <a:t>Click to edit Master subtitle style</a:t>
             </a:r>
-            <a:endParaRPr lang="en-US"/>
           </a:p>
         </p:txBody>
       </p:sp>
@@ -304,7 +318,7 @@
           <a:p>
             <a:fld id="{5BCAD085-E8A6-8845-BD4E-CB4CCA059FC4}" type="datetimeFigureOut">
               <a:rPr lang="en-US" smtClean="0"/>
-              <a:t>1/27/13</a:t>
+              <a:t>10/27/2026</a:t>
             </a:fld>
             <a:endParaRPr lang="en-US"/>
           </a:p>
@@ -398,10 +412,9 @@
           <a:lstStyle/>
           <a:p>
             <a:r>
-              <a:rPr lang="en-US" smtClean="0"/>
+              <a:rPr lang="en-US"/>
               <a:t>Click to edit Master title style</a:t>
             </a:r>
-            <a:endParaRPr lang="en-US"/>
           </a:p>
         </p:txBody>
       </p:sp>
@@ -422,38 +435,37 @@
           <a:p>
             <a:pPr lvl="0"/>
             <a:r>
-              <a:rPr lang="en-US" smtClean="0"/>
+              <a:rPr lang="en-US"/>
               <a:t>Click to edit Master text styles</a:t>
             </a:r>
           </a:p>
           <a:p>
             <a:pPr lvl="1"/>
             <a:r>
-              <a:rPr lang="en-US" smtClean="0"/>
+              <a:rPr lang="en-US"/>
               <a:t>Second level</a:t>
             </a:r>
           </a:p>
           <a:p>
             <a:pPr lvl="2"/>
             <a:r>
-              <a:rPr lang="en-US" smtClean="0"/>
+              <a:rPr lang="en-US"/>
               <a:t>Third level</a:t>
             </a:r>
           </a:p>
           <a:p>
             <a:pPr lvl="3"/>
             <a:r>
-              <a:rPr lang="en-US" smtClean="0"/>
+              <a:rPr lang="en-US"/>
               <a:t>Fourth level</a:t>
             </a:r>
           </a:p>
           <a:p>
             <a:pPr lvl="4"/>
             <a:r>
-              <a:rPr lang="en-US" smtClean="0"/>
+              <a:rPr lang="en-US"/>
               <a:t>Fifth level</a:t>
             </a:r>
-            <a:endParaRPr lang="en-US"/>
           </a:p>
         </p:txBody>
       </p:sp>
@@ -474,7 +486,7 @@
           <a:p>
             <a:fld id="{5BCAD085-E8A6-8845-BD4E-CB4CCA059FC4}" type="datetimeFigureOut">
               <a:rPr lang="en-US" smtClean="0"/>
-              <a:t>1/27/13</a:t>
+              <a:t>10/27/2026</a:t>
             </a:fld>
             <a:endParaRPr lang="en-US"/>
           </a:p>
@@ -573,10 +585,9 @@
           <a:lstStyle/>
           <a:p>
             <a:r>
-              <a:rPr lang="en-US" smtClean="0"/>
+              <a:rPr lang="en-US"/>
               <a:t>Click to edit Master title style</a:t>
             </a:r>
-            <a:endParaRPr lang="en-US"/>
           </a:p>
         </p:txBody>
       </p:sp>
@@ -602,38 +613,37 @@
           <a:p>
             <a:pPr lvl="0"/>
             <a:r>
-              <a:rPr lang="en-US" smtClean="0"/>
+              <a:rPr lang="en-US"/>
               <a:t>Click to edit Master text styles</a:t>
             </a:r>
           </a:p>
           <a:p>
             <a:pPr lvl="1"/>
             <a:r>
-              <a:rPr lang="en-US" smtClean="0"/>
+              <a:rPr lang="en-US"/>
               <a:t>Second level</a:t>
             </a:r>
           </a:p>
           <a:p>
             <a:pPr lvl="2"/>
             <a:r>
-              <a:rPr lang="en-US" smtClean="0"/>
+              <a:rPr lang="en-US"/>
               <a:t>Third level</a:t>
             </a:r>
           </a:p>
           <a:p>
             <a:pPr lvl="3"/>
             <a:r>
-              <a:rPr lang="en-US" smtClean="0"/>
+              <a:rPr lang="en-US"/>
               <a:t>Fourth level</a:t>
             </a:r>
           </a:p>
           <a:p>
             <a:pPr lvl="4"/>
             <a:r>
-              <a:rPr lang="en-US" smtClean="0"/>
+              <a:rPr lang="en-US"/>
               <a:t>Fifth level</a:t>
             </a:r>
-            <a:endParaRPr lang="en-US"/>
           </a:p>
         </p:txBody>
       </p:sp>
@@ -654,7 +664,7 @@
           <a:p>
             <a:fld id="{5BCAD085-E8A6-8845-BD4E-CB4CCA059FC4}" type="datetimeFigureOut">
               <a:rPr lang="en-US" smtClean="0"/>
-              <a:t>1/27/13</a:t>
+              <a:t>10/27/2026</a:t>
             </a:fld>
             <a:endParaRPr lang="en-US"/>
           </a:p>
@@ -748,10 +758,9 @@
           <a:lstStyle/>
           <a:p>
             <a:r>
-              <a:rPr lang="en-US" smtClean="0"/>
+              <a:rPr lang="en-US"/>
               <a:t>Click to edit Master title style</a:t>
             </a:r>
-            <a:endParaRPr lang="en-US"/>
           </a:p>
         </p:txBody>
       </p:sp>
@@ -772,38 +781,37 @@
           <a:p>
             <a:pPr lvl="0"/>
             <a:r>
-              <a:rPr lang="en-US" smtClean="0"/>
+              <a:rPr lang="en-US"/>
               <a:t>Click to edit Master text styles</a:t>
             </a:r>
           </a:p>
           <a:p>
             <a:pPr lvl="1"/>
             <a:r>
-              <a:rPr lang="en-US" smtClean="0"/>
+              <a:rPr lang="en-US"/>
               <a:t>Second level</a:t>
             </a:r>
           </a:p>
           <a:p>
             <a:pPr lvl="2"/>
             <a:r>
-              <a:rPr lang="en-US" smtClean="0"/>
+              <a:rPr lang="en-US"/>
               <a:t>Third level</a:t>
             </a:r>
           </a:p>
           <a:p>
             <a:pPr lvl="3"/>
             <a:r>
-              <a:rPr lang="en-US" smtClean="0"/>
+              <a:rPr lang="en-US"/>
               <a:t>Fourth level</a:t>
             </a:r>
           </a:p>
           <a:p>
             <a:pPr lvl="4"/>
             <a:r>
-              <a:rPr lang="en-US" smtClean="0"/>
+              <a:rPr lang="en-US"/>
               <a:t>Fifth level</a:t>
             </a:r>
-            <a:endParaRPr lang="en-US"/>
           </a:p>
         </p:txBody>
       </p:sp>
@@ -824,7 +832,7 @@
           <a:p>
             <a:fld id="{5BCAD085-E8A6-8845-BD4E-CB4CCA059FC4}" type="datetimeFigureOut">
               <a:rPr lang="en-US" smtClean="0"/>
-              <a:t>1/27/13</a:t>
+              <a:t>10/27/2026</a:t>
             </a:fld>
             <a:endParaRPr lang="en-US"/>
           </a:p>
@@ -927,10 +935,9 @@
           </a:lstStyle>
           <a:p>
             <a:r>
-              <a:rPr lang="en-US" smtClean="0"/>
+              <a:rPr lang="en-US"/>
               <a:t>Click to edit Master title style</a:t>
             </a:r>
-            <a:endParaRPr lang="en-US"/>
           </a:p>
         </p:txBody>
       </p:sp>
@@ -1047,7 +1054,7 @@
           <a:p>
             <a:pPr lvl="0"/>
             <a:r>
-              <a:rPr lang="en-US" smtClean="0"/>
+              <a:rPr lang="en-US"/>
               <a:t>Click to edit Master text styles</a:t>
             </a:r>
           </a:p>
@@ -1070,7 +1077,7 @@
           <a:p>
             <a:fld id="{5BCAD085-E8A6-8845-BD4E-CB4CCA059FC4}" type="datetimeFigureOut">
               <a:rPr lang="en-US" smtClean="0"/>
-              <a:t>1/27/13</a:t>
+              <a:t>10/27/2026</a:t>
             </a:fld>
             <a:endParaRPr lang="en-US"/>
           </a:p>
@@ -1164,10 +1171,9 @@
           <a:lstStyle/>
           <a:p>
             <a:r>
-              <a:rPr lang="en-US" smtClean="0"/>
+              <a:rPr lang="en-US"/>
               <a:t>Click to edit Master title style</a:t>
             </a:r>
-            <a:endParaRPr lang="en-US"/>
           </a:p>
         </p:txBody>
       </p:sp>
@@ -1221,38 +1227,37 @@
           <a:p>
             <a:pPr lvl="0"/>
             <a:r>
-              <a:rPr lang="en-US" smtClean="0"/>
+              <a:rPr lang="en-US"/>
               <a:t>Click to edit Master text styles</a:t>
             </a:r>
           </a:p>
           <a:p>
             <a:pPr lvl="1"/>
             <a:r>
-              <a:rPr lang="en-US" smtClean="0"/>
+              <a:rPr lang="en-US"/>
               <a:t>Second level</a:t>
             </a:r>
           </a:p>
           <a:p>
             <a:pPr lvl="2"/>
             <a:r>
-              <a:rPr lang="en-US" smtClean="0"/>
+              <a:rPr lang="en-US"/>
               <a:t>Third level</a:t>
             </a:r>
           </a:p>
           <a:p>
             <a:pPr lvl="3"/>
             <a:r>
-              <a:rPr lang="en-US" smtClean="0"/>
+              <a:rPr lang="en-US"/>
               <a:t>Fourth level</a:t>
             </a:r>
           </a:p>
           <a:p>
             <a:pPr lvl="4"/>
             <a:r>
-              <a:rPr lang="en-US" smtClean="0"/>
+              <a:rPr lang="en-US"/>
               <a:t>Fifth level</a:t>
             </a:r>
-            <a:endParaRPr lang="en-US"/>
           </a:p>
         </p:txBody>
       </p:sp>
@@ -1306,38 +1311,37 @@
           <a:p>
             <a:pPr lvl="0"/>
             <a:r>
-              <a:rPr lang="en-US" smtClean="0"/>
+              <a:rPr lang="en-US"/>
               <a:t>Click to edit Master text styles</a:t>
             </a:r>
           </a:p>
           <a:p>
             <a:pPr lvl="1"/>
             <a:r>
-              <a:rPr lang="en-US" smtClean="0"/>
+              <a:rPr lang="en-US"/>
               <a:t>Second level</a:t>
             </a:r>
           </a:p>
           <a:p>
             <a:pPr lvl="2"/>
             <a:r>
-              <a:rPr lang="en-US" smtClean="0"/>
+              <a:rPr lang="en-US"/>
               <a:t>Third level</a:t>
             </a:r>
           </a:p>
           <a:p>
             <a:pPr lvl="3"/>
             <a:r>
-              <a:rPr lang="en-US" smtClean="0"/>
+              <a:rPr lang="en-US"/>
               <a:t>Fourth level</a:t>
             </a:r>
           </a:p>
           <a:p>
             <a:pPr lvl="4"/>
             <a:r>
-              <a:rPr lang="en-US" smtClean="0"/>
+              <a:rPr lang="en-US"/>
               <a:t>Fifth level</a:t>
             </a:r>
-            <a:endParaRPr lang="en-US"/>
           </a:p>
         </p:txBody>
       </p:sp>
@@ -1358,7 +1362,7 @@
           <a:p>
             <a:fld id="{5BCAD085-E8A6-8845-BD4E-CB4CCA059FC4}" type="datetimeFigureOut">
               <a:rPr lang="en-US" smtClean="0"/>
-              <a:t>1/27/13</a:t>
+              <a:t>10/27/2026</a:t>
             </a:fld>
             <a:endParaRPr lang="en-US"/>
           </a:p>
@@ -1456,10 +1460,9 @@
           </a:lstStyle>
           <a:p>
             <a:r>
-              <a:rPr lang="en-US" smtClean="0"/>
+              <a:rPr lang="en-US"/>
               <a:t>Click to edit Master title style</a:t>
             </a:r>
-            <a:endParaRPr lang="en-US"/>
           </a:p>
         </p:txBody>
       </p:sp>
@@ -1522,7 +1525,7 @@
           <a:p>
             <a:pPr lvl="0"/>
             <a:r>
-              <a:rPr lang="en-US" smtClean="0"/>
+              <a:rPr lang="en-US"/>
               <a:t>Click to edit Master text styles</a:t>
             </a:r>
           </a:p>
@@ -1578,38 +1581,37 @@
           <a:p>
             <a:pPr lvl="0"/>
             <a:r>
-              <a:rPr lang="en-US" smtClean="0"/>
+              <a:rPr lang="en-US"/>
               <a:t>Click to edit Master text styles</a:t>
             </a:r>
           </a:p>
           <a:p>
             <a:pPr lvl="1"/>
             <a:r>
-              <a:rPr lang="en-US" smtClean="0"/>
+              <a:rPr lang="en-US"/>
               <a:t>Second level</a:t>
             </a:r>
           </a:p>
           <a:p>
             <a:pPr lvl="2"/>
             <a:r>
-              <a:rPr lang="en-US" smtClean="0"/>
+              <a:rPr lang="en-US"/>
               <a:t>Third level</a:t>
             </a:r>
           </a:p>
           <a:p>
             <a:pPr lvl="3"/>
             <a:r>
-              <a:rPr lang="en-US" smtClean="0"/>
+              <a:rPr lang="en-US"/>
               <a:t>Fourth level</a:t>
             </a:r>
           </a:p>
           <a:p>
             <a:pPr lvl="4"/>
             <a:r>
-              <a:rPr lang="en-US" smtClean="0"/>
+              <a:rPr lang="en-US"/>
               <a:t>Fifth level</a:t>
             </a:r>
-            <a:endParaRPr lang="en-US"/>
           </a:p>
         </p:txBody>
       </p:sp>
@@ -1672,7 +1674,7 @@
           <a:p>
             <a:pPr lvl="0"/>
             <a:r>
-              <a:rPr lang="en-US" smtClean="0"/>
+              <a:rPr lang="en-US"/>
               <a:t>Click to edit Master text styles</a:t>
             </a:r>
           </a:p>
@@ -1728,38 +1730,37 @@
           <a:p>
             <a:pPr lvl="0"/>
             <a:r>
-              <a:rPr lang="en-US" smtClean="0"/>
+              <a:rPr lang="en-US"/>
               <a:t>Click to edit Master text styles</a:t>
             </a:r>
           </a:p>
           <a:p>
             <a:pPr lvl="1"/>
             <a:r>
-              <a:rPr lang="en-US" smtClean="0"/>
+              <a:rPr lang="en-US"/>
               <a:t>Second level</a:t>
             </a:r>
           </a:p>
           <a:p>
             <a:pPr lvl="2"/>
             <a:r>
-              <a:rPr lang="en-US" smtClean="0"/>
+              <a:rPr lang="en-US"/>
               <a:t>Third level</a:t>
             </a:r>
           </a:p>
           <a:p>
             <a:pPr lvl="3"/>
             <a:r>
-              <a:rPr lang="en-US" smtClean="0"/>
+              <a:rPr lang="en-US"/>
               <a:t>Fourth level</a:t>
             </a:r>
           </a:p>
           <a:p>
             <a:pPr lvl="4"/>
             <a:r>
-              <a:rPr lang="en-US" smtClean="0"/>
+              <a:rPr lang="en-US"/>
               <a:t>Fifth level</a:t>
             </a:r>
-            <a:endParaRPr lang="en-US"/>
           </a:p>
         </p:txBody>
       </p:sp>
@@ -1780,7 +1781,7 @@
           <a:p>
             <a:fld id="{5BCAD085-E8A6-8845-BD4E-CB4CCA059FC4}" type="datetimeFigureOut">
               <a:rPr lang="en-US" smtClean="0"/>
-              <a:t>1/27/13</a:t>
+              <a:t>10/27/2026</a:t>
             </a:fld>
             <a:endParaRPr lang="en-US"/>
           </a:p>
@@ -1874,10 +1875,9 @@
           <a:lstStyle/>
           <a:p>
             <a:r>
-              <a:rPr lang="en-US" smtClean="0"/>
+              <a:rPr lang="en-US"/>
               <a:t>Click to edit Master title style</a:t>
             </a:r>
-            <a:endParaRPr lang="en-US"/>
           </a:p>
         </p:txBody>
       </p:sp>
@@ -1898,7 +1898,7 @@
           <a:p>
             <a:fld id="{5BCAD085-E8A6-8845-BD4E-CB4CCA059FC4}" type="datetimeFigureOut">
               <a:rPr lang="en-US" smtClean="0"/>
-              <a:t>1/27/13</a:t>
+              <a:t>10/27/2026</a:t>
             </a:fld>
             <a:endParaRPr lang="en-US"/>
           </a:p>
@@ -1993,7 +1993,7 @@
           <a:p>
             <a:fld id="{5BCAD085-E8A6-8845-BD4E-CB4CCA059FC4}" type="datetimeFigureOut">
               <a:rPr lang="en-US" smtClean="0"/>
-              <a:t>1/27/13</a:t>
+              <a:t>10/27/2026</a:t>
             </a:fld>
             <a:endParaRPr lang="en-US"/>
           </a:p>
@@ -2096,10 +2096,9 @@
           </a:lstStyle>
           <a:p>
             <a:r>
-              <a:rPr lang="en-US" smtClean="0"/>
+              <a:rPr lang="en-US"/>
               <a:t>Click to edit Master title style</a:t>
             </a:r>
-            <a:endParaRPr lang="en-US"/>
           </a:p>
         </p:txBody>
       </p:sp>
@@ -2153,38 +2152,37 @@
           <a:p>
             <a:pPr lvl="0"/>
             <a:r>
-              <a:rPr lang="en-US" smtClean="0"/>
+              <a:rPr lang="en-US"/>
               <a:t>Click to edit Master text styles</a:t>
             </a:r>
           </a:p>
           <a:p>
             <a:pPr lvl="1"/>
             <a:r>
-              <a:rPr lang="en-US" smtClean="0"/>
+              <a:rPr lang="en-US"/>
               <a:t>Second level</a:t>
             </a:r>
           </a:p>
           <a:p>
             <a:pPr lvl="2"/>
             <a:r>
-              <a:rPr lang="en-US" smtClean="0"/>
+              <a:rPr lang="en-US"/>
               <a:t>Third level</a:t>
             </a:r>
           </a:p>
           <a:p>
             <a:pPr lvl="3"/>
             <a:r>
-              <a:rPr lang="en-US" smtClean="0"/>
+              <a:rPr lang="en-US"/>
               <a:t>Fourth level</a:t>
             </a:r>
           </a:p>
           <a:p>
             <a:pPr lvl="4"/>
             <a:r>
-              <a:rPr lang="en-US" smtClean="0"/>
+              <a:rPr lang="en-US"/>
               <a:t>Fifth level</a:t>
             </a:r>
-            <a:endParaRPr lang="en-US"/>
           </a:p>
         </p:txBody>
       </p:sp>
@@ -2247,7 +2245,7 @@
           <a:p>
             <a:pPr lvl="0"/>
             <a:r>
-              <a:rPr lang="en-US" smtClean="0"/>
+              <a:rPr lang="en-US"/>
               <a:t>Click to edit Master text styles</a:t>
             </a:r>
           </a:p>
@@ -2270,7 +2268,7 @@
           <a:p>
             <a:fld id="{5BCAD085-E8A6-8845-BD4E-CB4CCA059FC4}" type="datetimeFigureOut">
               <a:rPr lang="en-US" smtClean="0"/>
-              <a:t>1/27/13</a:t>
+              <a:t>10/27/2026</a:t>
             </a:fld>
             <a:endParaRPr lang="en-US"/>
           </a:p>
@@ -2373,10 +2371,9 @@
           </a:lstStyle>
           <a:p>
             <a:r>
-              <a:rPr lang="en-US" smtClean="0"/>
+              <a:rPr lang="en-US"/>
               <a:t>Click to edit Master title style</a:t>
             </a:r>
-            <a:endParaRPr lang="en-US"/>
           </a:p>
         </p:txBody>
       </p:sp>
@@ -2500,7 +2497,7 @@
           <a:p>
             <a:pPr lvl="0"/>
             <a:r>
-              <a:rPr lang="en-US" smtClean="0"/>
+              <a:rPr lang="en-US"/>
               <a:t>Click to edit Master text styles</a:t>
             </a:r>
           </a:p>
@@ -2523,7 +2520,7 @@
           <a:p>
             <a:fld id="{5BCAD085-E8A6-8845-BD4E-CB4CCA059FC4}" type="datetimeFigureOut">
               <a:rPr lang="en-US" smtClean="0"/>
-              <a:t>1/27/13</a:t>
+              <a:t>10/27/2026</a:t>
             </a:fld>
             <a:endParaRPr lang="en-US"/>
           </a:p>
@@ -2632,10 +2629,9 @@
           <a:lstStyle/>
           <a:p>
             <a:r>
-              <a:rPr lang="en-US" smtClean="0"/>
+              <a:rPr lang="en-US"/>
               <a:t>Click to edit Master title style</a:t>
             </a:r>
-            <a:endParaRPr lang="en-US"/>
           </a:p>
         </p:txBody>
       </p:sp>
@@ -2666,38 +2662,37 @@
           <a:p>
             <a:pPr lvl="0"/>
             <a:r>
-              <a:rPr lang="en-US" smtClean="0"/>
+              <a:rPr lang="en-US"/>
               <a:t>Click to edit Master text styles</a:t>
             </a:r>
           </a:p>
           <a:p>
             <a:pPr lvl="1"/>
             <a:r>
-              <a:rPr lang="en-US" smtClean="0"/>
+              <a:rPr lang="en-US"/>
               <a:t>Second level</a:t>
             </a:r>
           </a:p>
           <a:p>
             <a:pPr lvl="2"/>
             <a:r>
-              <a:rPr lang="en-US" smtClean="0"/>
+              <a:rPr lang="en-US"/>
               <a:t>Third level</a:t>
             </a:r>
           </a:p>
           <a:p>
             <a:pPr lvl="3"/>
             <a:r>
-              <a:rPr lang="en-US" smtClean="0"/>
+              <a:rPr lang="en-US"/>
               <a:t>Fourth level</a:t>
             </a:r>
           </a:p>
           <a:p>
             <a:pPr lvl="4"/>
             <a:r>
-              <a:rPr lang="en-US" smtClean="0"/>
+              <a:rPr lang="en-US"/>
               <a:t>Fifth level</a:t>
             </a:r>
-            <a:endParaRPr lang="en-US"/>
           </a:p>
         </p:txBody>
       </p:sp>
@@ -2736,7 +2731,7 @@
           <a:p>
             <a:fld id="{5BCAD085-E8A6-8845-BD4E-CB4CCA059FC4}" type="datetimeFigureOut">
               <a:rPr lang="en-US" smtClean="0"/>
-              <a:t>1/27/13</a:t>
+              <a:t>10/27/2026</a:t>
             </a:fld>
             <a:endParaRPr lang="en-US"/>
           </a:p>
@@ -3095,7 +3090,7 @@
 </file>
 
 <file path=ppt/slides/slide1.xml><?xml version="1.0" encoding="utf-8"?>
-<p:sld xmlns:a="http://schemas.openxmlformats.org/drawingml/2006/main" xmlns:p="http://schemas.openxmlformats.org/presentationml/2006/main" xmlns:r="http://schemas.openxmlformats.org/officeDocument/2006/relationships">
+<p:sld xmlns:a="http://schemas.openxmlformats.org/drawingml/2006/main" xmlns:r="http://schemas.openxmlformats.org/officeDocument/2006/relationships" xmlns:p="http://schemas.openxmlformats.org/presentationml/2006/main">
   <p:cSld>
     <p:bg>
       <p:bgPr>
@@ -3111,7 +3106,14 @@
         <p:cNvGrpSpPr/>
         <p:nvPr/>
       </p:nvGrpSpPr>
-      <p:grpSpPr/>
+      <p:grpSpPr>
+        <a:xfrm>
+          <a:off x="0" y="0"/>
+          <a:ext cx="0" cy="0"/>
+          <a:chOff x="0" y="0"/>
+          <a:chExt cx="0" cy="0"/>
+        </a:xfrm>
+      </p:grpSpPr>
       <p:sp>
         <p:nvSpPr>
           <p:cNvPr id="2" name="TextBox 1"/>
@@ -3157,7 +3159,7 @@
         <p:spPr>
           <a:xfrm>
             <a:off x="731520" y="1188720"/>
-            <a:ext cx="7680960" cy="5303520"/>
+            <a:ext cx="7680960" cy="3041858"/>
           </a:xfrm>
           <a:prstGeom prst="rect">
             <a:avLst/>
@@ -3179,7 +3181,7 @@
               </a:defRPr>
             </a:pPr>
             <a:r>
-              <a:rPr b="1" sz="1600">
+              <a:rPr sz="1600" b="1" dirty="0">
                 <a:solidFill>
                   <a:srgbClr val="000000"/>
                 </a:solidFill>
@@ -3188,13 +3190,22 @@
               <a:t>• Project Title: </a:t>
             </a:r>
             <a:r>
-              <a:rPr b="0" sz="1600">
-                <a:solidFill>
-                  <a:srgbClr val="1E1E1E"/>
-                </a:solidFill>
-                <a:latin typeface="Arial"/>
-              </a:rPr>
-              <a:t>OmniSign 3D: Real-Time American Sign Language (ASL) Recognition &amp; Translation Studio</a:t>
+              <a:rPr sz="1600" b="0" dirty="0" err="1">
+                <a:solidFill>
+                  <a:srgbClr val="1E1E1E"/>
+                </a:solidFill>
+                <a:latin typeface="Arial"/>
+              </a:rPr>
+              <a:t>OmniSign</a:t>
+            </a:r>
+            <a:r>
+              <a:rPr sz="1600" b="0" dirty="0">
+                <a:solidFill>
+                  <a:srgbClr val="1E1E1E"/>
+                </a:solidFill>
+                <a:latin typeface="Arial"/>
+              </a:rPr>
+              <a:t> 3D: Real-Time American Sign Language (ASL) Recognition &amp; Translation Studio</a:t>
             </a:r>
           </a:p>
           <a:p>
@@ -3207,7 +3218,7 @@
               </a:defRPr>
             </a:pPr>
             <a:r>
-              <a:rPr b="1" sz="1600">
+              <a:rPr sz="1600" b="1" dirty="0">
                 <a:solidFill>
                   <a:srgbClr val="000000"/>
                 </a:solidFill>
@@ -3216,13 +3227,22 @@
               <a:t>• Student Name: </a:t>
             </a:r>
             <a:r>
-              <a:rPr b="0" sz="1600">
-                <a:solidFill>
-                  <a:srgbClr val="1E1E1E"/>
-                </a:solidFill>
-                <a:latin typeface="Arial"/>
-              </a:rPr>
-              <a:t>Joel Joe Varghese</a:t>
+              <a:rPr lang="en-US" sz="1600" b="1" dirty="0">
+                <a:solidFill>
+                  <a:srgbClr val="000000"/>
+                </a:solidFill>
+                <a:latin typeface="Arial"/>
+              </a:rPr>
+              <a:t>: </a:t>
+            </a:r>
+            <a:r>
+              <a:rPr lang="en-US" sz="1600" dirty="0">
+                <a:solidFill>
+                  <a:srgbClr val="1E1E1E"/>
+                </a:solidFill>
+                <a:latin typeface="Arial"/>
+              </a:rPr>
+              <a:t>Joel Varghese Joe , Jaden Borges ,Kenn Machado ,Angel Xavier </a:t>
             </a:r>
           </a:p>
           <a:p>
@@ -3235,22 +3255,49 @@
               </a:defRPr>
             </a:pPr>
             <a:r>
-              <a:rPr b="1" sz="1600">
-                <a:solidFill>
-                  <a:srgbClr val="000000"/>
-                </a:solidFill>
-                <a:latin typeface="Arial"/>
-              </a:rPr>
-              <a:t>• Roll No / Batch: </a:t>
-            </a:r>
-            <a:r>
-              <a:rPr b="0" sz="1600">
-                <a:solidFill>
-                  <a:srgbClr val="1E1E1E"/>
-                </a:solidFill>
-                <a:latin typeface="Arial"/>
-              </a:rPr>
-              <a:t>SE - AIML - IV / Batch 2022-2026</a:t>
+              <a:rPr sz="1600" b="1" dirty="0">
+                <a:solidFill>
+                  <a:srgbClr val="000000"/>
+                </a:solidFill>
+                <a:latin typeface="Arial"/>
+              </a:rPr>
+              <a:t>• Roll No / Batch</a:t>
+            </a:r>
+            <a:r>
+              <a:rPr sz="1600" b="1">
+                <a:solidFill>
+                  <a:srgbClr val="000000"/>
+                </a:solidFill>
+                <a:latin typeface="Arial"/>
+              </a:rPr>
+              <a:t>: </a:t>
+            </a:r>
+            <a:r>
+              <a:rPr lang="en-US" sz="1600">
+                <a:solidFill>
+                  <a:srgbClr val="1E1E1E"/>
+                </a:solidFill>
+                <a:latin typeface="Arial"/>
+              </a:rPr>
+              <a:t>01,02,03,04  </a:t>
+            </a:r>
+            <a:r>
+              <a:rPr lang="en-US" sz="1600" b="1">
+                <a:solidFill>
+                  <a:srgbClr val="000000"/>
+                </a:solidFill>
+                <a:latin typeface="Arial"/>
+              </a:rPr>
+              <a:t> </a:t>
+            </a:r>
+            <a:r>
+              <a:rPr lang="en-US" sz="1600">
+                <a:solidFill>
+                  <a:srgbClr val="1E1E1E"/>
+                </a:solidFill>
+                <a:latin typeface="Arial"/>
+              </a:rPr>
+              <a:t>TE Batch 1 </a:t>
             </a:r>
           </a:p>
           <a:p>
@@ -3263,16 +3310,25 @@
               </a:defRPr>
             </a:pPr>
             <a:r>
-              <a:rPr b="1" sz="1600">
-                <a:solidFill>
-                  <a:srgbClr val="000000"/>
-                </a:solidFill>
-                <a:latin typeface="Arial"/>
-              </a:rPr>
-              <a:t>• Course: </a:t>
-            </a:r>
-            <a:r>
-              <a:rPr b="0" sz="1600">
+              <a:rPr sz="1600" b="1">
+                <a:solidFill>
+                  <a:srgbClr val="000000"/>
+                </a:solidFill>
+                <a:latin typeface="Arial"/>
+              </a:rPr>
+              <a:t>• </a:t>
+            </a:r>
+            <a:r>
+              <a:rPr sz="1600" b="1" dirty="0">
+                <a:solidFill>
+                  <a:srgbClr val="000000"/>
+                </a:solidFill>
+                <a:latin typeface="Arial"/>
+              </a:rPr>
+              <a:t>Course: </a:t>
+            </a:r>
+            <a:r>
+              <a:rPr sz="1600" b="0" dirty="0">
                 <a:solidFill>
                   <a:srgbClr val="1E1E1E"/>
                 </a:solidFill>
@@ -3291,7 +3347,7 @@
               </a:defRPr>
             </a:pPr>
             <a:r>
-              <a:rPr b="1" sz="1600">
+              <a:rPr sz="1600" b="1" dirty="0">
                 <a:solidFill>
                   <a:srgbClr val="000000"/>
                 </a:solidFill>
@@ -3300,7 +3356,7 @@
               <a:t>• Guide Name: </a:t>
             </a:r>
             <a:r>
-              <a:rPr b="0" sz="1600">
+              <a:rPr sz="1600" b="0" dirty="0">
                 <a:solidFill>
                   <a:srgbClr val="1E1E1E"/>
                 </a:solidFill>
@@ -3319,7 +3375,7 @@
               </a:defRPr>
             </a:pPr>
             <a:r>
-              <a:rPr b="1" sz="1600">
+              <a:rPr sz="1600" b="1" dirty="0">
                 <a:solidFill>
                   <a:srgbClr val="000000"/>
                 </a:solidFill>
@@ -3328,7 +3384,7 @@
               <a:t>• Institute Name: </a:t>
             </a:r>
             <a:r>
-              <a:rPr b="0" sz="1600">
+              <a:rPr sz="1600" b="0" dirty="0">
                 <a:solidFill>
                   <a:srgbClr val="1E1E1E"/>
                 </a:solidFill>
@@ -3348,7 +3404,7 @@
 </file>
 
 <file path=ppt/slides/slide10.xml><?xml version="1.0" encoding="utf-8"?>
-<p:sld xmlns:a="http://schemas.openxmlformats.org/drawingml/2006/main" xmlns:p="http://schemas.openxmlformats.org/presentationml/2006/main" xmlns:r="http://schemas.openxmlformats.org/officeDocument/2006/relationships">
+<p:sld xmlns:a="http://schemas.openxmlformats.org/drawingml/2006/main" xmlns:r="http://schemas.openxmlformats.org/officeDocument/2006/relationships" xmlns:p="http://schemas.openxmlformats.org/presentationml/2006/main">
   <p:cSld>
     <p:bg>
       <p:bgPr>
@@ -3364,7 +3420,14 @@
         <p:cNvGrpSpPr/>
         <p:nvPr/>
       </p:nvGrpSpPr>
-      <p:grpSpPr/>
+      <p:grpSpPr>
+        <a:xfrm>
+          <a:off x="0" y="0"/>
+          <a:ext cx="0" cy="0"/>
+          <a:chOff x="0" y="0"/>
+          <a:chExt cx="0" cy="0"/>
+        </a:xfrm>
+      </p:grpSpPr>
       <p:sp>
         <p:nvSpPr>
           <p:cNvPr id="2" name="TextBox 1"/>
@@ -3432,7 +3495,7 @@
               </a:defRPr>
             </a:pPr>
             <a:r>
-              <a:rPr b="1" sz="1500">
+              <a:rPr sz="1500" b="1">
                 <a:solidFill>
                   <a:srgbClr val="000000"/>
                 </a:solidFill>
@@ -3451,7 +3514,7 @@
               </a:defRPr>
             </a:pPr>
             <a:r>
-              <a:rPr b="1" sz="1400">
+              <a:rPr sz="1400" b="1">
                 <a:solidFill>
                   <a:srgbClr val="000000"/>
                 </a:solidFill>
@@ -3460,7 +3523,7 @@
               <a:t>  1. Top-1 Categorical Accuracy: </a:t>
             </a:r>
             <a:r>
-              <a:rPr b="0" sz="1400">
+              <a:rPr sz="1400" b="0">
                 <a:solidFill>
                   <a:srgbClr val="1E1E1E"/>
                 </a:solidFill>
@@ -3479,7 +3542,7 @@
               </a:defRPr>
             </a:pPr>
             <a:r>
-              <a:rPr b="1" sz="1400">
+              <a:rPr sz="1400" b="1">
                 <a:solidFill>
                   <a:srgbClr val="000000"/>
                 </a:solidFill>
@@ -3488,7 +3551,7 @@
               <a:t>  2. Top-5 Categorical Accuracy: </a:t>
             </a:r>
             <a:r>
-              <a:rPr b="0" sz="1400">
+              <a:rPr sz="1400" b="0">
                 <a:solidFill>
                   <a:srgbClr val="1E1E1E"/>
                 </a:solidFill>
@@ -3507,7 +3570,7 @@
               </a:defRPr>
             </a:pPr>
             <a:r>
-              <a:rPr b="1" sz="1400">
+              <a:rPr sz="1400" b="1">
                 <a:solidFill>
                   <a:srgbClr val="000000"/>
                 </a:solidFill>
@@ -3516,7 +3579,7 @@
               <a:t>  3. Macro Precision &amp; Recall: </a:t>
             </a:r>
             <a:r>
-              <a:rPr b="0" sz="1400">
+              <a:rPr sz="1400" b="0">
                 <a:solidFill>
                   <a:srgbClr val="1E1E1E"/>
                 </a:solidFill>
@@ -3535,7 +3598,7 @@
               </a:defRPr>
             </a:pPr>
             <a:r>
-              <a:rPr b="1" sz="1400">
+              <a:rPr sz="1400" b="1">
                 <a:solidFill>
                   <a:srgbClr val="000000"/>
                 </a:solidFill>
@@ -3544,7 +3607,7 @@
               <a:t>  4. Macro F1-Score: </a:t>
             </a:r>
             <a:r>
-              <a:rPr b="0" sz="1400">
+              <a:rPr sz="1400" b="0">
                 <a:solidFill>
                   <a:srgbClr val="1E1E1E"/>
                 </a:solidFill>
@@ -3563,7 +3626,7 @@
               </a:defRPr>
             </a:pPr>
             <a:r>
-              <a:rPr b="1" sz="1400">
+              <a:rPr sz="1400" b="1">
                 <a:solidFill>
                   <a:srgbClr val="000000"/>
                 </a:solidFill>
@@ -3572,7 +3635,7 @@
               <a:t>  5. Inference Latency (ms): </a:t>
             </a:r>
             <a:r>
-              <a:rPr b="0" sz="1400">
+              <a:rPr sz="1400" b="0">
                 <a:solidFill>
                   <a:srgbClr val="1E1E1E"/>
                 </a:solidFill>
@@ -3591,7 +3654,7 @@
               </a:defRPr>
             </a:pPr>
             <a:r>
-              <a:rPr b="1" sz="1500">
+              <a:rPr sz="1500" b="1">
                 <a:solidFill>
                   <a:srgbClr val="000000"/>
                 </a:solidFill>
@@ -3610,7 +3673,7 @@
               </a:defRPr>
             </a:pPr>
             <a:r>
-              <a:rPr b="1" sz="1400">
+              <a:rPr sz="1400" b="1">
                 <a:solidFill>
                   <a:srgbClr val="000000"/>
                 </a:solidFill>
@@ -3619,7 +3682,7 @@
               <a:t>  - Multi-Class Granularity: </a:t>
             </a:r>
             <a:r>
-              <a:rPr b="0" sz="1400">
+              <a:rPr sz="1400" b="0">
                 <a:solidFill>
                   <a:srgbClr val="1E1E1E"/>
                 </a:solidFill>
@@ -3638,7 +3701,7 @@
               </a:defRPr>
             </a:pPr>
             <a:r>
-              <a:rPr b="1" sz="1400">
+              <a:rPr sz="1400" b="1">
                 <a:solidFill>
                   <a:srgbClr val="000000"/>
                 </a:solidFill>
@@ -3647,7 +3710,7 @@
               <a:t>  - Robustness to Imbalance: </a:t>
             </a:r>
             <a:r>
-              <a:rPr b="0" sz="1400">
+              <a:rPr sz="1400" b="0">
                 <a:solidFill>
                   <a:srgbClr val="1E1E1E"/>
                 </a:solidFill>
@@ -3666,7 +3729,7 @@
               </a:defRPr>
             </a:pPr>
             <a:r>
-              <a:rPr b="1" sz="1400">
+              <a:rPr sz="1400" b="1">
                 <a:solidFill>
                   <a:srgbClr val="000000"/>
                 </a:solidFill>
@@ -3675,7 +3738,7 @@
               <a:t>  - Real-Time Usability: </a:t>
             </a:r>
             <a:r>
-              <a:rPr b="0" sz="1400">
+              <a:rPr sz="1400" b="0">
                 <a:solidFill>
                   <a:srgbClr val="1E1E1E"/>
                 </a:solidFill>
@@ -3695,7 +3758,7 @@
 </file>
 
 <file path=ppt/slides/slide11.xml><?xml version="1.0" encoding="utf-8"?>
-<p:sld xmlns:a="http://schemas.openxmlformats.org/drawingml/2006/main" xmlns:p="http://schemas.openxmlformats.org/presentationml/2006/main" xmlns:r="http://schemas.openxmlformats.org/officeDocument/2006/relationships">
+<p:sld xmlns:a="http://schemas.openxmlformats.org/drawingml/2006/main" xmlns:r="http://schemas.openxmlformats.org/officeDocument/2006/relationships" xmlns:p="http://schemas.openxmlformats.org/presentationml/2006/main">
   <p:cSld>
     <p:bg>
       <p:bgPr>
@@ -3711,7 +3774,14 @@
         <p:cNvGrpSpPr/>
         <p:nvPr/>
       </p:nvGrpSpPr>
-      <p:grpSpPr/>
+      <p:grpSpPr>
+        <a:xfrm>
+          <a:off x="0" y="0"/>
+          <a:ext cx="0" cy="0"/>
+          <a:chOff x="0" y="0"/>
+          <a:chExt cx="0" cy="0"/>
+        </a:xfrm>
+      </p:grpSpPr>
       <p:sp>
         <p:nvSpPr>
           <p:cNvPr id="2" name="TextBox 1"/>
@@ -3779,7 +3849,7 @@
               </a:defRPr>
             </a:pPr>
             <a:r>
-              <a:rPr b="1" sz="1450">
+              <a:rPr sz="1450" b="1">
                 <a:solidFill>
                   <a:srgbClr val="000000"/>
                 </a:solidFill>
@@ -3788,7 +3858,7 @@
               <a:t>• Programming Language: </a:t>
             </a:r>
             <a:r>
-              <a:rPr b="0" sz="1450">
+              <a:rPr sz="1450" b="0">
                 <a:solidFill>
                   <a:srgbClr val="1E1E1E"/>
                 </a:solidFill>
@@ -3807,7 +3877,7 @@
               </a:defRPr>
             </a:pPr>
             <a:r>
-              <a:rPr b="1" sz="1450">
+              <a:rPr sz="1450" b="1">
                 <a:solidFill>
                   <a:srgbClr val="000000"/>
                 </a:solidFill>
@@ -3816,7 +3886,7 @@
               <a:t>• Deep Learning Frameworks: </a:t>
             </a:r>
             <a:r>
-              <a:rPr b="0" sz="1450">
+              <a:rPr sz="1450" b="0">
                 <a:solidFill>
                   <a:srgbClr val="1E1E1E"/>
                 </a:solidFill>
@@ -3835,7 +3905,7 @@
               </a:defRPr>
             </a:pPr>
             <a:r>
-              <a:rPr b="1" sz="1450">
+              <a:rPr sz="1450" b="1">
                 <a:solidFill>
                   <a:srgbClr val="000000"/>
                 </a:solidFill>
@@ -3844,7 +3914,7 @@
               <a:t>• Computer Vision &amp; Perception: </a:t>
             </a:r>
             <a:r>
-              <a:rPr b="0" sz="1450">
+              <a:rPr sz="1450" b="0">
                 <a:solidFill>
                   <a:srgbClr val="1E1E1E"/>
                 </a:solidFill>
@@ -3863,7 +3933,7 @@
               </a:defRPr>
             </a:pPr>
             <a:r>
-              <a:rPr b="1" sz="1450">
+              <a:rPr sz="1450" b="1">
                 <a:solidFill>
                   <a:srgbClr val="000000"/>
                 </a:solidFill>
@@ -3872,7 +3942,7 @@
               <a:t>• Numerical &amp; Data Processing: </a:t>
             </a:r>
             <a:r>
-              <a:rPr b="0" sz="1450">
+              <a:rPr sz="1450" b="0">
                 <a:solidFill>
                   <a:srgbClr val="1E1E1E"/>
                 </a:solidFill>
@@ -3891,7 +3961,7 @@
               </a:defRPr>
             </a:pPr>
             <a:r>
-              <a:rPr b="1" sz="1450">
+              <a:rPr sz="1450" b="1">
                 <a:solidFill>
                   <a:srgbClr val="000000"/>
                 </a:solidFill>
@@ -3900,7 +3970,7 @@
               <a:t>• Web Framework &amp; Backend: </a:t>
             </a:r>
             <a:r>
-              <a:rPr b="0" sz="1450">
+              <a:rPr sz="1450" b="0">
                 <a:solidFill>
                   <a:srgbClr val="1E1E1E"/>
                 </a:solidFill>
@@ -3919,7 +3989,7 @@
               </a:defRPr>
             </a:pPr>
             <a:r>
-              <a:rPr b="1" sz="1450">
+              <a:rPr sz="1450" b="1">
                 <a:solidFill>
                   <a:srgbClr val="000000"/>
                 </a:solidFill>
@@ -3928,7 +3998,7 @@
               <a:t>• Frontend &amp; 3D Visualization: </a:t>
             </a:r>
             <a:r>
-              <a:rPr b="0" sz="1450">
+              <a:rPr sz="1450" b="0">
                 <a:solidFill>
                   <a:srgbClr val="1E1E1E"/>
                 </a:solidFill>
@@ -3947,7 +4017,7 @@
               </a:defRPr>
             </a:pPr>
             <a:r>
-              <a:rPr b="1" sz="1450">
+              <a:rPr sz="1450" b="1">
                 <a:solidFill>
                   <a:srgbClr val="000000"/>
                 </a:solidFill>
@@ -3956,7 +4026,7 @@
               <a:t>• Version Control &amp; Environment: </a:t>
             </a:r>
             <a:r>
-              <a:rPr b="0" sz="1450">
+              <a:rPr sz="1450" b="0">
                 <a:solidFill>
                   <a:srgbClr val="1E1E1E"/>
                 </a:solidFill>
@@ -3976,7 +4046,7 @@
 </file>
 
 <file path=ppt/slides/slide12.xml><?xml version="1.0" encoding="utf-8"?>
-<p:sld xmlns:a="http://schemas.openxmlformats.org/drawingml/2006/main" xmlns:p="http://schemas.openxmlformats.org/presentationml/2006/main" xmlns:r="http://schemas.openxmlformats.org/officeDocument/2006/relationships">
+<p:sld xmlns:a="http://schemas.openxmlformats.org/drawingml/2006/main" xmlns:r="http://schemas.openxmlformats.org/officeDocument/2006/relationships" xmlns:p="http://schemas.openxmlformats.org/presentationml/2006/main">
   <p:cSld>
     <p:bg>
       <p:bgPr>
@@ -3992,7 +4062,14 @@
         <p:cNvGrpSpPr/>
         <p:nvPr/>
       </p:nvGrpSpPr>
-      <p:grpSpPr/>
+      <p:grpSpPr>
+        <a:xfrm>
+          <a:off x="0" y="0"/>
+          <a:ext cx="0" cy="0"/>
+          <a:chOff x="0" y="0"/>
+          <a:chExt cx="0" cy="0"/>
+        </a:xfrm>
+      </p:grpSpPr>
       <p:sp>
         <p:nvSpPr>
           <p:cNvPr id="2" name="TextBox 1"/>
@@ -4060,7 +4137,7 @@
               </a:defRPr>
             </a:pPr>
             <a:r>
-              <a:rPr b="1" sz="1500">
+              <a:rPr sz="1500" b="1">
                 <a:solidFill>
                   <a:srgbClr val="000000"/>
                 </a:solidFill>
@@ -4079,7 +4156,7 @@
               </a:defRPr>
             </a:pPr>
             <a:r>
-              <a:rPr b="1" sz="1400">
+              <a:rPr sz="1400" b="1">
                 <a:solidFill>
                   <a:srgbClr val="000000"/>
                 </a:solidFill>
@@ -4088,7 +4165,7 @@
               <a:t>  - Complete Feature Extraction: </a:t>
             </a:r>
             <a:r>
-              <a:rPr b="0" sz="1400">
+              <a:rPr sz="1400" b="0">
                 <a:solidFill>
                   <a:srgbClr val="1E1E1E"/>
                 </a:solidFill>
@@ -4107,7 +4184,7 @@
               </a:defRPr>
             </a:pPr>
             <a:r>
-              <a:rPr b="1" sz="1400">
+              <a:rPr sz="1400" b="1">
                 <a:solidFill>
                   <a:srgbClr val="000000"/>
                 </a:solidFill>
@@ -4116,7 +4193,7 @@
               <a:t>  - Partitions Staged: </a:t>
             </a:r>
             <a:r>
-              <a:rPr b="0" sz="1400">
+              <a:rPr sz="1400" b="0">
                 <a:solidFill>
                   <a:srgbClr val="1E1E1E"/>
                 </a:solidFill>
@@ -4135,7 +4212,7 @@
               </a:defRPr>
             </a:pPr>
             <a:r>
-              <a:rPr b="1" sz="1500">
+              <a:rPr sz="1500" b="1">
                 <a:solidFill>
                   <a:srgbClr val="000000"/>
                 </a:solidFill>
@@ -4154,7 +4231,7 @@
               </a:defRPr>
             </a:pPr>
             <a:r>
-              <a:rPr b="1" sz="1400">
+              <a:rPr sz="1400" b="1">
                 <a:solidFill>
                   <a:srgbClr val="000000"/>
                 </a:solidFill>
@@ -4173,7 +4250,7 @@
               </a:defRPr>
             </a:pPr>
             <a:r>
-              <a:rPr b="1" sz="1400">
+              <a:rPr sz="1400" b="1">
                 <a:solidFill>
                   <a:srgbClr val="000000"/>
                 </a:solidFill>
@@ -4192,7 +4269,7 @@
               </a:defRPr>
             </a:pPr>
             <a:r>
-              <a:rPr b="1" sz="1500">
+              <a:rPr sz="1500" b="1">
                 <a:solidFill>
                   <a:srgbClr val="000000"/>
                 </a:solidFill>
@@ -4211,7 +4288,7 @@
               </a:defRPr>
             </a:pPr>
             <a:r>
-              <a:rPr b="1" sz="1400">
+              <a:rPr sz="1400" b="1">
                 <a:solidFill>
                   <a:srgbClr val="000000"/>
                 </a:solidFill>
@@ -4230,7 +4307,7 @@
               </a:defRPr>
             </a:pPr>
             <a:r>
-              <a:rPr b="1" sz="1400">
+              <a:rPr sz="1400" b="1">
                 <a:solidFill>
                   <a:srgbClr val="000000"/>
                 </a:solidFill>
@@ -4249,7 +4326,7 @@
               </a:defRPr>
             </a:pPr>
             <a:r>
-              <a:rPr b="1" sz="1400">
+              <a:rPr sz="1400" b="1">
                 <a:solidFill>
                   <a:srgbClr val="000000"/>
                 </a:solidFill>
@@ -4269,7 +4346,7 @@
 </file>
 
 <file path=ppt/slides/slide13.xml><?xml version="1.0" encoding="utf-8"?>
-<p:sld xmlns:a="http://schemas.openxmlformats.org/drawingml/2006/main" xmlns:p="http://schemas.openxmlformats.org/presentationml/2006/main" xmlns:r="http://schemas.openxmlformats.org/officeDocument/2006/relationships">
+<p:sld xmlns:a="http://schemas.openxmlformats.org/drawingml/2006/main" xmlns:r="http://schemas.openxmlformats.org/officeDocument/2006/relationships" xmlns:p="http://schemas.openxmlformats.org/presentationml/2006/main">
   <p:cSld>
     <p:bg>
       <p:bgPr>
@@ -4285,7 +4362,14 @@
         <p:cNvGrpSpPr/>
         <p:nvPr/>
       </p:nvGrpSpPr>
-      <p:grpSpPr/>
+      <p:grpSpPr>
+        <a:xfrm>
+          <a:off x="0" y="0"/>
+          <a:ext cx="0" cy="0"/>
+          <a:chOff x="0" y="0"/>
+          <a:chExt cx="0" cy="0"/>
+        </a:xfrm>
+      </p:grpSpPr>
       <p:sp>
         <p:nvSpPr>
           <p:cNvPr id="2" name="TextBox 1"/>
@@ -4374,7 +4458,7 @@
               </a:defRPr>
             </a:pPr>
             <a:r>
-              <a:rPr b="1" sz="1400">
+              <a:rPr sz="1400" b="1">
                 <a:solidFill>
                   <a:srgbClr val="000000"/>
                 </a:solidFill>
@@ -4393,7 +4477,7 @@
               </a:defRPr>
             </a:pPr>
             <a:r>
-              <a:rPr b="1" sz="1300">
+              <a:rPr sz="1300" b="1">
                 <a:solidFill>
                   <a:srgbClr val="000000"/>
                 </a:solidFill>
@@ -4402,7 +4486,7 @@
               <a:t>  - Top-1 Validation Acc: </a:t>
             </a:r>
             <a:r>
-              <a:rPr b="0" sz="1300">
+              <a:rPr sz="1300" b="0">
                 <a:solidFill>
                   <a:srgbClr val="1E1E1E"/>
                 </a:solidFill>
@@ -4421,7 +4505,7 @@
               </a:defRPr>
             </a:pPr>
             <a:r>
-              <a:rPr b="1" sz="1300">
+              <a:rPr sz="1300" b="1">
                 <a:solidFill>
                   <a:srgbClr val="000000"/>
                 </a:solidFill>
@@ -4430,7 +4514,7 @@
               <a:t>  - Top-5 Validation Acc: </a:t>
             </a:r>
             <a:r>
-              <a:rPr b="0" sz="1300">
+              <a:rPr sz="1300" b="0">
                 <a:solidFill>
                   <a:srgbClr val="1E1E1E"/>
                 </a:solidFill>
@@ -4449,7 +4533,7 @@
               </a:defRPr>
             </a:pPr>
             <a:r>
-              <a:rPr b="1" sz="1300">
+              <a:rPr sz="1300" b="1">
                 <a:solidFill>
                   <a:srgbClr val="000000"/>
                 </a:solidFill>
@@ -4458,7 +4542,7 @@
               <a:t>  - Macro F1-Score: </a:t>
             </a:r>
             <a:r>
-              <a:rPr b="0" sz="1300">
+              <a:rPr sz="1300" b="0">
                 <a:solidFill>
                   <a:srgbClr val="1E1E1E"/>
                 </a:solidFill>
@@ -4477,7 +4561,7 @@
               </a:defRPr>
             </a:pPr>
             <a:r>
-              <a:rPr b="1" sz="1300">
+              <a:rPr sz="1300" b="1">
                 <a:solidFill>
                   <a:srgbClr val="000000"/>
                 </a:solidFill>
@@ -4486,7 +4570,7 @@
               <a:t>  - CPU Latency: </a:t>
             </a:r>
             <a:r>
-              <a:rPr b="0" sz="1300">
+              <a:rPr sz="1300" b="0">
                 <a:solidFill>
                   <a:srgbClr val="1E1E1E"/>
                 </a:solidFill>
@@ -4528,7 +4612,7 @@
               </a:defRPr>
             </a:pPr>
             <a:r>
-              <a:rPr b="1" sz="1500">
+              <a:rPr sz="1500" b="1">
                 <a:solidFill>
                   <a:srgbClr val="000000"/>
                 </a:solidFill>
@@ -4547,7 +4631,7 @@
               </a:defRPr>
             </a:pPr>
             <a:r>
-              <a:rPr b="1" sz="1350">
+              <a:rPr sz="1350" b="1">
                 <a:solidFill>
                   <a:srgbClr val="000000"/>
                 </a:solidFill>
@@ -4556,7 +4640,7 @@
               <a:t>  1. Real-Time Feasibility: </a:t>
             </a:r>
             <a:r>
-              <a:rPr b="0" sz="1350">
+              <a:rPr sz="1350" b="0">
                 <a:solidFill>
                   <a:srgbClr val="1E1E1E"/>
                 </a:solidFill>
@@ -4575,7 +4659,7 @@
               </a:defRPr>
             </a:pPr>
             <a:r>
-              <a:rPr b="1" sz="1350">
+              <a:rPr sz="1350" b="1">
                 <a:solidFill>
                   <a:srgbClr val="000000"/>
                 </a:solidFill>
@@ -4584,7 +4668,7 @@
               <a:t>  2. Generalization Gap: </a:t>
             </a:r>
             <a:r>
-              <a:rPr b="0" sz="1350">
+              <a:rPr sz="1350" b="0">
                 <a:solidFill>
                   <a:srgbClr val="1E1E1E"/>
                 </a:solidFill>
@@ -4603,7 +4687,7 @@
               </a:defRPr>
             </a:pPr>
             <a:r>
-              <a:rPr b="1" sz="1350">
+              <a:rPr sz="1350" b="1">
                 <a:solidFill>
                   <a:srgbClr val="000000"/>
                 </a:solidFill>
@@ -4612,7 +4696,7 @@
               <a:t>  3. Minimal-Pair Ambiguity: </a:t>
             </a:r>
             <a:r>
-              <a:rPr b="0" sz="1350">
+              <a:rPr sz="1350" b="0">
                 <a:solidFill>
                   <a:srgbClr val="1E1E1E"/>
                 </a:solidFill>
@@ -4632,7 +4716,7 @@
 </file>
 
 <file path=ppt/slides/slide14.xml><?xml version="1.0" encoding="utf-8"?>
-<p:sld xmlns:a="http://schemas.openxmlformats.org/drawingml/2006/main" xmlns:p="http://schemas.openxmlformats.org/presentationml/2006/main" xmlns:r="http://schemas.openxmlformats.org/officeDocument/2006/relationships">
+<p:sld xmlns:a="http://schemas.openxmlformats.org/drawingml/2006/main" xmlns:r="http://schemas.openxmlformats.org/officeDocument/2006/relationships" xmlns:p="http://schemas.openxmlformats.org/presentationml/2006/main">
   <p:cSld>
     <p:bg>
       <p:bgPr>
@@ -4648,7 +4732,14 @@
         <p:cNvGrpSpPr/>
         <p:nvPr/>
       </p:nvGrpSpPr>
-      <p:grpSpPr/>
+      <p:grpSpPr>
+        <a:xfrm>
+          <a:off x="0" y="0"/>
+          <a:ext cx="0" cy="0"/>
+          <a:chOff x="0" y="0"/>
+          <a:chExt cx="0" cy="0"/>
+        </a:xfrm>
+      </p:grpSpPr>
       <p:sp>
         <p:nvSpPr>
           <p:cNvPr id="2" name="TextBox 1"/>
@@ -4716,7 +4807,7 @@
               </a:defRPr>
             </a:pPr>
             <a:r>
-              <a:rPr b="1" sz="1500">
+              <a:rPr sz="1500" b="1">
                 <a:solidFill>
                   <a:srgbClr val="000000"/>
                 </a:solidFill>
@@ -4725,7 +4816,7 @@
               <a:t>• Data Issues: </a:t>
             </a:r>
             <a:r>
-              <a:rPr b="0" sz="1500">
+              <a:rPr sz="1500" b="0">
                 <a:solidFill>
                   <a:srgbClr val="1E1E1E"/>
                 </a:solidFill>
@@ -4744,7 +4835,7 @@
               </a:defRPr>
             </a:pPr>
             <a:r>
-              <a:rPr b="1" sz="1500">
+              <a:rPr sz="1500" b="1">
                 <a:solidFill>
                   <a:srgbClr val="000000"/>
                 </a:solidFill>
@@ -4753,7 +4844,7 @@
               <a:t>• Implementation Challenges: </a:t>
             </a:r>
             <a:r>
-              <a:rPr b="0" sz="1500">
+              <a:rPr sz="1500" b="0">
                 <a:solidFill>
                   <a:srgbClr val="1E1E1E"/>
                 </a:solidFill>
@@ -4772,7 +4863,7 @@
               </a:defRPr>
             </a:pPr>
             <a:r>
-              <a:rPr b="1" sz="1500">
+              <a:rPr sz="1500" b="1">
                 <a:solidFill>
                   <a:srgbClr val="000000"/>
                 </a:solidFill>
@@ -4781,7 +4872,7 @@
               <a:t>• Occlusion Difficulties: </a:t>
             </a:r>
             <a:r>
-              <a:rPr b="0" sz="1500">
+              <a:rPr sz="1500" b="0">
                 <a:solidFill>
                   <a:srgbClr val="1E1E1E"/>
                 </a:solidFill>
@@ -4800,7 +4891,7 @@
               </a:defRPr>
             </a:pPr>
             <a:r>
-              <a:rPr b="1" sz="1500">
+              <a:rPr sz="1500" b="1">
                 <a:solidFill>
                   <a:srgbClr val="000000"/>
                 </a:solidFill>
@@ -4809,7 +4900,7 @@
               <a:t>• Understanding Difficulties: </a:t>
             </a:r>
             <a:r>
-              <a:rPr b="0" sz="1500">
+              <a:rPr sz="1500" b="0">
                 <a:solidFill>
                   <a:srgbClr val="1E1E1E"/>
                 </a:solidFill>
@@ -4829,7 +4920,7 @@
 </file>
 
 <file path=ppt/slides/slide15.xml><?xml version="1.0" encoding="utf-8"?>
-<p:sld xmlns:a="http://schemas.openxmlformats.org/drawingml/2006/main" xmlns:p="http://schemas.openxmlformats.org/presentationml/2006/main" xmlns:r="http://schemas.openxmlformats.org/officeDocument/2006/relationships">
+<p:sld xmlns:a="http://schemas.openxmlformats.org/drawingml/2006/main" xmlns:r="http://schemas.openxmlformats.org/officeDocument/2006/relationships" xmlns:p="http://schemas.openxmlformats.org/presentationml/2006/main">
   <p:cSld>
     <p:bg>
       <p:bgPr>
@@ -4845,7 +4936,14 @@
         <p:cNvGrpSpPr/>
         <p:nvPr/>
       </p:nvGrpSpPr>
-      <p:grpSpPr/>
+      <p:grpSpPr>
+        <a:xfrm>
+          <a:off x="0" y="0"/>
+          <a:ext cx="0" cy="0"/>
+          <a:chOff x="0" y="0"/>
+          <a:chExt cx="0" cy="0"/>
+        </a:xfrm>
+      </p:grpSpPr>
       <p:sp>
         <p:nvSpPr>
           <p:cNvPr id="2" name="TextBox 1"/>
@@ -4913,7 +5011,7 @@
               </a:defRPr>
             </a:pPr>
             <a:r>
-              <a:rPr b="1" sz="1500">
+              <a:rPr sz="1500" b="1">
                 <a:solidFill>
                   <a:srgbClr val="000000"/>
                 </a:solidFill>
@@ -4932,7 +5030,7 @@
               </a:defRPr>
             </a:pPr>
             <a:r>
-              <a:rPr b="1" sz="1400">
+              <a:rPr sz="1400" b="1">
                 <a:solidFill>
                   <a:srgbClr val="000000"/>
                 </a:solidFill>
@@ -4941,7 +5039,7 @@
               <a:t>  - Spatial-Temporal Transformer: </a:t>
             </a:r>
             <a:r>
-              <a:rPr b="0" sz="1400">
+              <a:rPr sz="1400" b="0">
                 <a:solidFill>
                   <a:srgbClr val="1E1E1E"/>
                 </a:solidFill>
@@ -4960,7 +5058,7 @@
               </a:defRPr>
             </a:pPr>
             <a:r>
-              <a:rPr b="1" sz="1400">
+              <a:rPr sz="1400" b="1">
                 <a:solidFill>
                   <a:srgbClr val="000000"/>
                 </a:solidFill>
@@ -4969,7 +5067,7 @@
               <a:t>  - Weighted Neural Ensemble: </a:t>
             </a:r>
             <a:r>
-              <a:rPr b="0" sz="1400">
+              <a:rPr sz="1400" b="0">
                 <a:solidFill>
                   <a:srgbClr val="1E1E1E"/>
                 </a:solidFill>
@@ -4988,7 +5086,7 @@
               </a:defRPr>
             </a:pPr>
             <a:r>
-              <a:rPr b="1" sz="1500">
+              <a:rPr sz="1500" b="1">
                 <a:solidFill>
                   <a:srgbClr val="000000"/>
                 </a:solidFill>
@@ -5007,7 +5105,7 @@
               </a:defRPr>
             </a:pPr>
             <a:r>
-              <a:rPr b="1" sz="1400">
+              <a:rPr sz="1400" b="1">
                 <a:solidFill>
                   <a:srgbClr val="000000"/>
                 </a:solidFill>
@@ -5016,7 +5114,7 @@
               <a:t>  - Bidirectional 3D Studio: </a:t>
             </a:r>
             <a:r>
-              <a:rPr b="0" sz="1400">
+              <a:rPr sz="1400" b="0">
                 <a:solidFill>
                   <a:srgbClr val="1E1E1E"/>
                 </a:solidFill>
@@ -5035,7 +5133,7 @@
               </a:defRPr>
             </a:pPr>
             <a:r>
-              <a:rPr b="1" sz="1400">
+              <a:rPr sz="1400" b="1">
                 <a:solidFill>
                   <a:srgbClr val="000000"/>
                 </a:solidFill>
@@ -5044,7 +5142,7 @@
               <a:t>  - 8-Frame Hermite Transition Blending: </a:t>
             </a:r>
             <a:r>
-              <a:rPr b="0" sz="1400">
+              <a:rPr sz="1400" b="0">
                 <a:solidFill>
                   <a:srgbClr val="1E1E1E"/>
                 </a:solidFill>
@@ -5063,7 +5161,7 @@
               </a:defRPr>
             </a:pPr>
             <a:r>
-              <a:rPr b="1" sz="1400">
+              <a:rPr sz="1400" b="1">
                 <a:solidFill>
                   <a:srgbClr val="000000"/>
                 </a:solidFill>
@@ -5072,7 +5170,7 @@
               <a:t>  - Full WLASL-2000 Expansion: </a:t>
             </a:r>
             <a:r>
-              <a:rPr b="0" sz="1400">
+              <a:rPr sz="1400" b="0">
                 <a:solidFill>
                   <a:srgbClr val="1E1E1E"/>
                 </a:solidFill>
@@ -5091,7 +5189,7 @@
               </a:defRPr>
             </a:pPr>
             <a:r>
-              <a:rPr b="1" sz="1400">
+              <a:rPr sz="1400" b="1">
                 <a:solidFill>
                   <a:srgbClr val="000000"/>
                 </a:solidFill>
@@ -5100,7 +5198,7 @@
               <a:t>• 3. Research Paper Writing: </a:t>
             </a:r>
             <a:r>
-              <a:rPr b="0" sz="1400">
+              <a:rPr sz="1400" b="0">
                 <a:solidFill>
                   <a:srgbClr val="1E1E1E"/>
                 </a:solidFill>
@@ -5120,7 +5218,7 @@
 </file>
 
 <file path=ppt/slides/slide16.xml><?xml version="1.0" encoding="utf-8"?>
-<p:sld xmlns:a="http://schemas.openxmlformats.org/drawingml/2006/main" xmlns:p="http://schemas.openxmlformats.org/presentationml/2006/main" xmlns:r="http://schemas.openxmlformats.org/officeDocument/2006/relationships">
+<p:sld xmlns:a="http://schemas.openxmlformats.org/drawingml/2006/main" xmlns:r="http://schemas.openxmlformats.org/officeDocument/2006/relationships" xmlns:p="http://schemas.openxmlformats.org/presentationml/2006/main">
   <p:cSld>
     <p:bg>
       <p:bgPr>
@@ -5136,7 +5234,14 @@
         <p:cNvGrpSpPr/>
         <p:nvPr/>
       </p:nvGrpSpPr>
-      <p:grpSpPr/>
+      <p:grpSpPr>
+        <a:xfrm>
+          <a:off x="0" y="0"/>
+          <a:ext cx="0" cy="0"/>
+          <a:chOff x="0" y="0"/>
+          <a:chExt cx="0" cy="0"/>
+        </a:xfrm>
+      </p:grpSpPr>
       <p:sp>
         <p:nvSpPr>
           <p:cNvPr id="2" name="TextBox 1"/>
@@ -5204,7 +5309,7 @@
               </a:defRPr>
             </a:pPr>
             <a:r>
-              <a:rPr b="1" sz="1500">
+              <a:rPr sz="1500" b="1">
                 <a:solidFill>
                   <a:srgbClr val="000000"/>
                 </a:solidFill>
@@ -5213,7 +5318,7 @@
               <a:t>• Deliverable 1: Dataset Files &amp; Feature Callset: </a:t>
             </a:r>
             <a:r>
-              <a:rPr b="0" sz="1500">
+              <a:rPr sz="1500" b="0">
                 <a:solidFill>
                   <a:srgbClr val="1E1E1E"/>
                 </a:solidFill>
@@ -5232,7 +5337,7 @@
               </a:defRPr>
             </a:pPr>
             <a:r>
-              <a:rPr b="1" sz="1500">
+              <a:rPr sz="1500" b="1">
                 <a:solidFill>
                   <a:srgbClr val="000000"/>
                 </a:solidFill>
@@ -5241,7 +5346,7 @@
               <a:t>• Deliverable 2: Jupyter Notebook &amp; Training Scripts: </a:t>
             </a:r>
             <a:r>
-              <a:rPr b="0" sz="1500">
+              <a:rPr sz="1500" b="0">
                 <a:solidFill>
                   <a:srgbClr val="1E1E1E"/>
                 </a:solidFill>
@@ -5260,7 +5365,7 @@
               </a:defRPr>
             </a:pPr>
             <a:r>
-              <a:rPr b="1" sz="1500">
+              <a:rPr sz="1500" b="1">
                 <a:solidFill>
                   <a:srgbClr val="000000"/>
                 </a:solidFill>
@@ -5269,7 +5374,7 @@
               <a:t>• Deliverable 3: GitHub Repository: </a:t>
             </a:r>
             <a:r>
-              <a:rPr b="0" sz="1500">
+              <a:rPr sz="1500" b="0">
                 <a:solidFill>
                   <a:srgbClr val="1E1E1E"/>
                 </a:solidFill>
@@ -5288,7 +5393,7 @@
               </a:defRPr>
             </a:pPr>
             <a:r>
-              <a:rPr b="1" sz="1500">
+              <a:rPr sz="1500" b="1">
                 <a:solidFill>
                   <a:srgbClr val="000000"/>
                 </a:solidFill>
@@ -5297,7 +5402,7 @@
               <a:t>• Deliverable 4: Block Diagram Images: </a:t>
             </a:r>
             <a:r>
-              <a:rPr b="0" sz="1500">
+              <a:rPr sz="1500" b="0">
                 <a:solidFill>
                   <a:srgbClr val="1E1E1E"/>
                 </a:solidFill>
@@ -5317,7 +5422,7 @@
 </file>
 
 <file path=ppt/slides/slide17.xml><?xml version="1.0" encoding="utf-8"?>
-<p:sld xmlns:a="http://schemas.openxmlformats.org/drawingml/2006/main" xmlns:p="http://schemas.openxmlformats.org/presentationml/2006/main" xmlns:r="http://schemas.openxmlformats.org/officeDocument/2006/relationships">
+<p:sld xmlns:a="http://schemas.openxmlformats.org/drawingml/2006/main" xmlns:r="http://schemas.openxmlformats.org/officeDocument/2006/relationships" xmlns:p="http://schemas.openxmlformats.org/presentationml/2006/main">
   <p:cSld>
     <p:bg>
       <p:bgPr>
@@ -5333,7 +5438,14 @@
         <p:cNvGrpSpPr/>
         <p:nvPr/>
       </p:nvGrpSpPr>
-      <p:grpSpPr/>
+      <p:grpSpPr>
+        <a:xfrm>
+          <a:off x="0" y="0"/>
+          <a:ext cx="0" cy="0"/>
+          <a:chOff x="0" y="0"/>
+          <a:chExt cx="0" cy="0"/>
+        </a:xfrm>
+      </p:grpSpPr>
       <p:sp>
         <p:nvSpPr>
           <p:cNvPr id="2" name="TextBox 1"/>
@@ -5401,7 +5513,7 @@
               </a:defRPr>
             </a:pPr>
             <a:r>
-              <a:rPr b="1" sz="1500">
+              <a:rPr sz="1500" b="1">
                 <a:solidFill>
                   <a:srgbClr val="000000"/>
                 </a:solidFill>
@@ -5420,7 +5532,7 @@
               </a:defRPr>
             </a:pPr>
             <a:r>
-              <a:rPr b="1" sz="1200">
+              <a:rPr sz="1200" b="1">
                 <a:solidFill>
                   <a:srgbClr val="000000"/>
                 </a:solidFill>
@@ -5429,7 +5541,7 @@
               <a:t>  [1] </a:t>
             </a:r>
             <a:r>
-              <a:rPr b="0" sz="1200">
+              <a:rPr sz="1200" b="0">
                 <a:solidFill>
                   <a:srgbClr val="1E1E1E"/>
                 </a:solidFill>
@@ -5448,7 +5560,7 @@
               </a:defRPr>
             </a:pPr>
             <a:r>
-              <a:rPr b="1" sz="1500">
+              <a:rPr sz="1500" b="1">
                 <a:solidFill>
                   <a:srgbClr val="000000"/>
                 </a:solidFill>
@@ -5467,7 +5579,7 @@
               </a:defRPr>
             </a:pPr>
             <a:r>
-              <a:rPr b="1" sz="1200">
+              <a:rPr sz="1200" b="1">
                 <a:solidFill>
                   <a:srgbClr val="000000"/>
                 </a:solidFill>
@@ -5476,7 +5588,7 @@
               <a:t>  [2] </a:t>
             </a:r>
             <a:r>
-              <a:rPr b="0" sz="1200">
+              <a:rPr sz="1200" b="0">
                 <a:solidFill>
                   <a:srgbClr val="1E1E1E"/>
                 </a:solidFill>
@@ -5495,7 +5607,7 @@
               </a:defRPr>
             </a:pPr>
             <a:r>
-              <a:rPr b="1" sz="1200">
+              <a:rPr sz="1200" b="1">
                 <a:solidFill>
                   <a:srgbClr val="000000"/>
                 </a:solidFill>
@@ -5504,7 +5616,7 @@
               <a:t>  [3] </a:t>
             </a:r>
             <a:r>
-              <a:rPr b="0" sz="1200">
+              <a:rPr sz="1200" b="0">
                 <a:solidFill>
                   <a:srgbClr val="1E1E1E"/>
                 </a:solidFill>
@@ -5523,7 +5635,7 @@
               </a:defRPr>
             </a:pPr>
             <a:r>
-              <a:rPr b="1" sz="1200">
+              <a:rPr sz="1200" b="1">
                 <a:solidFill>
                   <a:srgbClr val="000000"/>
                 </a:solidFill>
@@ -5532,7 +5644,7 @@
               <a:t>  [4] </a:t>
             </a:r>
             <a:r>
-              <a:rPr b="0" sz="1200">
+              <a:rPr sz="1200" b="0">
                 <a:solidFill>
                   <a:srgbClr val="1E1E1E"/>
                 </a:solidFill>
@@ -5551,7 +5663,7 @@
               </a:defRPr>
             </a:pPr>
             <a:r>
-              <a:rPr b="1" sz="1500">
+              <a:rPr sz="1500" b="1">
                 <a:solidFill>
                   <a:srgbClr val="000000"/>
                 </a:solidFill>
@@ -5570,7 +5682,7 @@
               </a:defRPr>
             </a:pPr>
             <a:r>
-              <a:rPr b="1" sz="1200">
+              <a:rPr sz="1200" b="1">
                 <a:solidFill>
                   <a:srgbClr val="000000"/>
                 </a:solidFill>
@@ -5579,7 +5691,7 @@
               <a:t>  [5] </a:t>
             </a:r>
             <a:r>
-              <a:rPr b="0" sz="1200">
+              <a:rPr sz="1200" b="0">
                 <a:solidFill>
                   <a:srgbClr val="1E1E1E"/>
                 </a:solidFill>
@@ -5598,7 +5710,7 @@
               </a:defRPr>
             </a:pPr>
             <a:r>
-              <a:rPr b="1" sz="1200">
+              <a:rPr sz="1200" b="1">
                 <a:solidFill>
                   <a:srgbClr val="000000"/>
                 </a:solidFill>
@@ -5607,7 +5719,7 @@
               <a:t>  [6] </a:t>
             </a:r>
             <a:r>
-              <a:rPr b="0" sz="1200">
+              <a:rPr sz="1200" b="0">
                 <a:solidFill>
                   <a:srgbClr val="1E1E1E"/>
                 </a:solidFill>
@@ -5626,7 +5738,7 @@
               </a:defRPr>
             </a:pPr>
             <a:r>
-              <a:rPr b="1" sz="1200">
+              <a:rPr sz="1200" b="1">
                 <a:solidFill>
                   <a:srgbClr val="000000"/>
                 </a:solidFill>
@@ -5635,7 +5747,7 @@
               <a:t>  [7] </a:t>
             </a:r>
             <a:r>
-              <a:rPr b="0" sz="1200">
+              <a:rPr sz="1200" b="0">
                 <a:solidFill>
                   <a:srgbClr val="1E1E1E"/>
                 </a:solidFill>
@@ -5655,7 +5767,7 @@
 </file>
 
 <file path=ppt/slides/slide2.xml><?xml version="1.0" encoding="utf-8"?>
-<p:sld xmlns:a="http://schemas.openxmlformats.org/drawingml/2006/main" xmlns:p="http://schemas.openxmlformats.org/presentationml/2006/main" xmlns:r="http://schemas.openxmlformats.org/officeDocument/2006/relationships">
+<p:sld xmlns:a="http://schemas.openxmlformats.org/drawingml/2006/main" xmlns:r="http://schemas.openxmlformats.org/officeDocument/2006/relationships" xmlns:p="http://schemas.openxmlformats.org/presentationml/2006/main">
   <p:cSld>
     <p:bg>
       <p:bgPr>
@@ -5671,7 +5783,14 @@
         <p:cNvGrpSpPr/>
         <p:nvPr/>
       </p:nvGrpSpPr>
-      <p:grpSpPr/>
+      <p:grpSpPr>
+        <a:xfrm>
+          <a:off x="0" y="0"/>
+          <a:ext cx="0" cy="0"/>
+          <a:chOff x="0" y="0"/>
+          <a:chExt cx="0" cy="0"/>
+        </a:xfrm>
+      </p:grpSpPr>
       <p:sp>
         <p:nvSpPr>
           <p:cNvPr id="2" name="TextBox 1"/>
@@ -5739,7 +5858,7 @@
               </a:defRPr>
             </a:pPr>
             <a:r>
-              <a:rPr b="1" sz="1500">
+              <a:rPr sz="1500" b="1">
                 <a:solidFill>
                   <a:srgbClr val="000000"/>
                 </a:solidFill>
@@ -5748,7 +5867,7 @@
               <a:t>• Final Problem Definition: </a:t>
             </a:r>
             <a:r>
-              <a:rPr b="0" sz="1500">
+              <a:rPr sz="1500" b="0">
                 <a:solidFill>
                   <a:srgbClr val="1E1E1E"/>
                 </a:solidFill>
@@ -5767,7 +5886,7 @@
               </a:defRPr>
             </a:pPr>
             <a:r>
-              <a:rPr b="1" sz="1500">
+              <a:rPr sz="1500" b="1">
                 <a:solidFill>
                   <a:srgbClr val="000000"/>
                 </a:solidFill>
@@ -5786,7 +5905,7 @@
               </a:defRPr>
             </a:pPr>
             <a:r>
-              <a:rPr b="1" sz="1400">
+              <a:rPr sz="1400" b="1">
                 <a:solidFill>
                   <a:srgbClr val="000000"/>
                 </a:solidFill>
@@ -5795,7 +5914,7 @@
               <a:t>  - Input: </a:t>
             </a:r>
             <a:r>
-              <a:rPr b="0" sz="1400">
+              <a:rPr sz="1400" b="0">
                 <a:solidFill>
                   <a:srgbClr val="1E1E1E"/>
                 </a:solidFill>
@@ -5814,7 +5933,7 @@
               </a:defRPr>
             </a:pPr>
             <a:r>
-              <a:rPr b="1" sz="1400">
+              <a:rPr sz="1400" b="1">
                 <a:solidFill>
                   <a:srgbClr val="000000"/>
                 </a:solidFill>
@@ -5823,7 +5942,7 @@
               <a:t>  - Output: </a:t>
             </a:r>
             <a:r>
-              <a:rPr b="0" sz="1400">
+              <a:rPr sz="1400" b="0">
                 <a:solidFill>
                   <a:srgbClr val="1E1E1E"/>
                 </a:solidFill>
@@ -5842,7 +5961,7 @@
               </a:defRPr>
             </a:pPr>
             <a:r>
-              <a:rPr b="1" sz="1500">
+              <a:rPr sz="1500" b="1">
                 <a:solidFill>
                   <a:srgbClr val="000000"/>
                 </a:solidFill>
@@ -5861,7 +5980,7 @@
               </a:defRPr>
             </a:pPr>
             <a:r>
-              <a:rPr b="1" sz="1350">
+              <a:rPr sz="1350" b="1">
                 <a:solidFill>
                   <a:srgbClr val="000000"/>
                 </a:solidFill>
@@ -5870,7 +5989,7 @@
               <a:t>  1. Healthcare &amp; Telehealth: </a:t>
             </a:r>
             <a:r>
-              <a:rPr b="0" sz="1350">
+              <a:rPr sz="1350" b="0">
                 <a:solidFill>
                   <a:srgbClr val="1E1E1E"/>
                 </a:solidFill>
@@ -5889,7 +6008,7 @@
               </a:defRPr>
             </a:pPr>
             <a:r>
-              <a:rPr b="1" sz="1350">
+              <a:rPr sz="1350" b="1">
                 <a:solidFill>
                   <a:srgbClr val="000000"/>
                 </a:solidFill>
@@ -5898,7 +6017,7 @@
               <a:t>  2. Educational Classrooms: </a:t>
             </a:r>
             <a:r>
-              <a:rPr b="0" sz="1350">
+              <a:rPr sz="1350" b="0">
                 <a:solidFill>
                   <a:srgbClr val="1E1E1E"/>
                 </a:solidFill>
@@ -5917,7 +6036,7 @@
               </a:defRPr>
             </a:pPr>
             <a:r>
-              <a:rPr b="1" sz="1350">
+              <a:rPr sz="1350" b="1">
                 <a:solidFill>
                   <a:srgbClr val="000000"/>
                 </a:solidFill>
@@ -5926,7 +6045,7 @@
               <a:t>  3. Public Service Counters: </a:t>
             </a:r>
             <a:r>
-              <a:rPr b="0" sz="1350">
+              <a:rPr sz="1350" b="0">
                 <a:solidFill>
                   <a:srgbClr val="1E1E1E"/>
                 </a:solidFill>
@@ -5946,7 +6065,7 @@
 </file>
 
 <file path=ppt/slides/slide3.xml><?xml version="1.0" encoding="utf-8"?>
-<p:sld xmlns:a="http://schemas.openxmlformats.org/drawingml/2006/main" xmlns:p="http://schemas.openxmlformats.org/presentationml/2006/main" xmlns:r="http://schemas.openxmlformats.org/officeDocument/2006/relationships">
+<p:sld xmlns:a="http://schemas.openxmlformats.org/drawingml/2006/main" xmlns:r="http://schemas.openxmlformats.org/officeDocument/2006/relationships" xmlns:p="http://schemas.openxmlformats.org/presentationml/2006/main">
   <p:cSld>
     <p:bg>
       <p:bgPr>
@@ -5962,7 +6081,14 @@
         <p:cNvGrpSpPr/>
         <p:nvPr/>
       </p:nvGrpSpPr>
-      <p:grpSpPr/>
+      <p:grpSpPr>
+        <a:xfrm>
+          <a:off x="0" y="0"/>
+          <a:ext cx="0" cy="0"/>
+          <a:chOff x="0" y="0"/>
+          <a:chExt cx="0" cy="0"/>
+        </a:xfrm>
+      </p:grpSpPr>
       <p:sp>
         <p:nvSpPr>
           <p:cNvPr id="2" name="TextBox 1"/>
@@ -6030,7 +6156,7 @@
               </a:defRPr>
             </a:pPr>
             <a:r>
-              <a:rPr b="1" sz="1500">
+              <a:rPr sz="1500" b="1">
                 <a:solidFill>
                   <a:srgbClr val="000000"/>
                 </a:solidFill>
@@ -6039,7 +6165,7 @@
               <a:t>• Dataset Source: </a:t>
             </a:r>
             <a:r>
-              <a:rPr b="0" sz="1500">
+              <a:rPr sz="1500" b="0">
                 <a:solidFill>
                   <a:srgbClr val="1E1E1E"/>
                 </a:solidFill>
@@ -6058,7 +6184,7 @@
               </a:defRPr>
             </a:pPr>
             <a:r>
-              <a:rPr b="1" sz="1500">
+              <a:rPr sz="1500" b="1">
                 <a:solidFill>
                   <a:srgbClr val="000000"/>
                 </a:solidFill>
@@ -6077,7 +6203,7 @@
               </a:defRPr>
             </a:pPr>
             <a:r>
-              <a:rPr b="1" sz="1400">
+              <a:rPr sz="1400" b="1">
                 <a:solidFill>
                   <a:srgbClr val="000000"/>
                 </a:solidFill>
@@ -6086,7 +6212,7 @@
               <a:t>  - Total Raw Video Clips: </a:t>
             </a:r>
             <a:r>
-              <a:rPr b="0" sz="1400">
+              <a:rPr sz="1400" b="0">
                 <a:solidFill>
                   <a:srgbClr val="1E1E1E"/>
                 </a:solidFill>
@@ -6105,7 +6231,7 @@
               </a:defRPr>
             </a:pPr>
             <a:r>
-              <a:rPr b="1" sz="1400">
+              <a:rPr sz="1400" b="1">
                 <a:solidFill>
                   <a:srgbClr val="000000"/>
                 </a:solidFill>
@@ -6114,7 +6240,7 @@
               <a:t>  - Training Set (70%): </a:t>
             </a:r>
             <a:r>
-              <a:rPr b="0" sz="1400">
+              <a:rPr sz="1400" b="0">
                 <a:solidFill>
                   <a:srgbClr val="1E1E1E"/>
                 </a:solidFill>
@@ -6133,7 +6259,7 @@
               </a:defRPr>
             </a:pPr>
             <a:r>
-              <a:rPr b="1" sz="1400">
+              <a:rPr sz="1400" b="1">
                 <a:solidFill>
                   <a:srgbClr val="000000"/>
                 </a:solidFill>
@@ -6142,7 +6268,7 @@
               <a:t>  - Validation Set (15%): </a:t>
             </a:r>
             <a:r>
-              <a:rPr b="0" sz="1400">
+              <a:rPr sz="1400" b="0">
                 <a:solidFill>
                   <a:srgbClr val="1E1E1E"/>
                 </a:solidFill>
@@ -6161,7 +6287,7 @@
               </a:defRPr>
             </a:pPr>
             <a:r>
-              <a:rPr b="1" sz="1400">
+              <a:rPr sz="1400" b="1">
                 <a:solidFill>
                   <a:srgbClr val="000000"/>
                 </a:solidFill>
@@ -6170,7 +6296,7 @@
               <a:t>  - Test Set (15%): </a:t>
             </a:r>
             <a:r>
-              <a:rPr b="0" sz="1400">
+              <a:rPr sz="1400" b="0">
                 <a:solidFill>
                   <a:srgbClr val="1E1E1E"/>
                 </a:solidFill>
@@ -6189,7 +6315,7 @@
               </a:defRPr>
             </a:pPr>
             <a:r>
-              <a:rPr b="1" sz="1500">
+              <a:rPr sz="1500" b="1">
                 <a:solidFill>
                   <a:srgbClr val="000000"/>
                 </a:solidFill>
@@ -6208,7 +6334,7 @@
               </a:defRPr>
             </a:pPr>
             <a:r>
-              <a:rPr b="1" sz="1400">
+              <a:rPr sz="1400" b="1">
                 <a:solidFill>
                   <a:srgbClr val="000000"/>
                 </a:solidFill>
@@ -6217,7 +6343,7 @@
               <a:t>  - Feature Vector: </a:t>
             </a:r>
             <a:r>
-              <a:rPr b="0" sz="1400">
+              <a:rPr sz="1400" b="0">
                 <a:solidFill>
                   <a:srgbClr val="1E1E1E"/>
                 </a:solidFill>
@@ -6236,7 +6362,7 @@
               </a:defRPr>
             </a:pPr>
             <a:r>
-              <a:rPr b="1" sz="1400">
+              <a:rPr sz="1400" b="1">
                 <a:solidFill>
                   <a:srgbClr val="000000"/>
                 </a:solidFill>
@@ -6245,7 +6371,7 @@
               <a:t>  - Temporal Window: </a:t>
             </a:r>
             <a:r>
-              <a:rPr b="0" sz="1400">
+              <a:rPr sz="1400" b="0">
                 <a:solidFill>
                   <a:srgbClr val="1E1E1E"/>
                 </a:solidFill>
@@ -6265,7 +6391,7 @@
 </file>
 
 <file path=ppt/slides/slide4.xml><?xml version="1.0" encoding="utf-8"?>
-<p:sld xmlns:a="http://schemas.openxmlformats.org/drawingml/2006/main" xmlns:p="http://schemas.openxmlformats.org/presentationml/2006/main" xmlns:r="http://schemas.openxmlformats.org/officeDocument/2006/relationships">
+<p:sld xmlns:a="http://schemas.openxmlformats.org/drawingml/2006/main" xmlns:r="http://schemas.openxmlformats.org/officeDocument/2006/relationships" xmlns:p="http://schemas.openxmlformats.org/presentationml/2006/main">
   <p:cSld>
     <p:bg>
       <p:bgPr>
@@ -6281,7 +6407,14 @@
         <p:cNvGrpSpPr/>
         <p:nvPr/>
       </p:nvGrpSpPr>
-      <p:grpSpPr/>
+      <p:grpSpPr>
+        <a:xfrm>
+          <a:off x="0" y="0"/>
+          <a:ext cx="0" cy="0"/>
+          <a:chOff x="0" y="0"/>
+          <a:chExt cx="0" cy="0"/>
+        </a:xfrm>
+      </p:grpSpPr>
       <p:sp>
         <p:nvSpPr>
           <p:cNvPr id="2" name="TextBox 1"/>
@@ -6349,7 +6482,7 @@
               </a:defRPr>
             </a:pPr>
             <a:r>
-              <a:rPr b="1" sz="1500">
+              <a:rPr sz="1500" b="1">
                 <a:solidFill>
                   <a:srgbClr val="000000"/>
                 </a:solidFill>
@@ -6368,7 +6501,7 @@
               </a:defRPr>
             </a:pPr>
             <a:r>
-              <a:rPr b="1" sz="1400">
+              <a:rPr sz="1400" b="1">
                 <a:solidFill>
                   <a:srgbClr val="000000"/>
                 </a:solidFill>
@@ -6377,7 +6510,7 @@
               <a:t>  - Continuous Numerical Features: </a:t>
             </a:r>
             <a:r>
-              <a:rPr b="0" sz="1400">
+              <a:rPr sz="1400" b="0">
                 <a:solidFill>
                   <a:srgbClr val="1E1E1E"/>
                 </a:solidFill>
@@ -6396,7 +6529,7 @@
               </a:defRPr>
             </a:pPr>
             <a:r>
-              <a:rPr b="1" sz="1400">
+              <a:rPr sz="1400" b="1">
                 <a:solidFill>
                   <a:srgbClr val="000000"/>
                 </a:solidFill>
@@ -6405,7 +6538,7 @@
               <a:t>  - Categorical Target Labels: </a:t>
             </a:r>
             <a:r>
-              <a:rPr b="0" sz="1400">
+              <a:rPr sz="1400" b="0">
                 <a:solidFill>
                   <a:srgbClr val="1E1E1E"/>
                 </a:solidFill>
@@ -6424,7 +6557,7 @@
               </a:defRPr>
             </a:pPr>
             <a:r>
-              <a:rPr b="1" sz="1500">
+              <a:rPr sz="1500" b="1">
                 <a:solidFill>
                   <a:srgbClr val="000000"/>
                 </a:solidFill>
@@ -6443,7 +6576,7 @@
               </a:defRPr>
             </a:pPr>
             <a:r>
-              <a:rPr b="1" sz="1400">
+              <a:rPr sz="1400" b="1">
                 <a:solidFill>
                   <a:srgbClr val="000000"/>
                 </a:solidFill>
@@ -6452,7 +6585,7 @@
               <a:t>  - Hand Occlusion &amp; Out-of-Frame Signs: </a:t>
             </a:r>
             <a:r>
-              <a:rPr b="0" sz="1400">
+              <a:rPr sz="1400" b="0">
                 <a:solidFill>
                   <a:srgbClr val="1E1E1E"/>
                 </a:solidFill>
@@ -6471,7 +6604,7 @@
               </a:defRPr>
             </a:pPr>
             <a:r>
-              <a:rPr b="1" sz="1400">
+              <a:rPr sz="1400" b="1">
                 <a:solidFill>
                   <a:srgbClr val="000000"/>
                 </a:solidFill>
@@ -6480,7 +6613,7 @@
               <a:t>  - Mitigation Strategy: </a:t>
             </a:r>
             <a:r>
-              <a:rPr b="0" sz="1400">
+              <a:rPr sz="1400" b="0">
                 <a:solidFill>
                   <a:srgbClr val="1E1E1E"/>
                 </a:solidFill>
@@ -6499,7 +6632,7 @@
               </a:defRPr>
             </a:pPr>
             <a:r>
-              <a:rPr b="1" sz="1500">
+              <a:rPr sz="1500" b="1">
                 <a:solidFill>
                   <a:srgbClr val="000000"/>
                 </a:solidFill>
@@ -6518,7 +6651,7 @@
               </a:defRPr>
             </a:pPr>
             <a:r>
-              <a:rPr b="1" sz="1400">
+              <a:rPr sz="1400" b="1">
                 <a:solidFill>
                   <a:srgbClr val="000000"/>
                 </a:solidFill>
@@ -6527,7 +6660,7 @@
               <a:t>  - Video Duration Variance: </a:t>
             </a:r>
             <a:r>
-              <a:rPr b="0" sz="1400">
+              <a:rPr sz="1400" b="0">
                 <a:solidFill>
                   <a:srgbClr val="1E1E1E"/>
                 </a:solidFill>
@@ -6546,7 +6679,7 @@
               </a:defRPr>
             </a:pPr>
             <a:r>
-              <a:rPr b="1" sz="1400">
+              <a:rPr sz="1400" b="1">
                 <a:solidFill>
                   <a:srgbClr val="000000"/>
                 </a:solidFill>
@@ -6555,7 +6688,7 @@
               <a:t>  - Natural Sample Imbalance: </a:t>
             </a:r>
             <a:r>
-              <a:rPr b="0" sz="1400">
+              <a:rPr sz="1400" b="0">
                 <a:solidFill>
                   <a:srgbClr val="1E1E1E"/>
                 </a:solidFill>
@@ -6575,7 +6708,7 @@
 </file>
 
 <file path=ppt/slides/slide5.xml><?xml version="1.0" encoding="utf-8"?>
-<p:sld xmlns:a="http://schemas.openxmlformats.org/drawingml/2006/main" xmlns:p="http://schemas.openxmlformats.org/presentationml/2006/main" xmlns:r="http://schemas.openxmlformats.org/officeDocument/2006/relationships">
+<p:sld xmlns:a="http://schemas.openxmlformats.org/drawingml/2006/main" xmlns:r="http://schemas.openxmlformats.org/officeDocument/2006/relationships" xmlns:p="http://schemas.openxmlformats.org/presentationml/2006/main">
   <p:cSld>
     <p:bg>
       <p:bgPr>
@@ -6591,7 +6724,14 @@
         <p:cNvGrpSpPr/>
         <p:nvPr/>
       </p:nvGrpSpPr>
-      <p:grpSpPr/>
+      <p:grpSpPr>
+        <a:xfrm>
+          <a:off x="0" y="0"/>
+          <a:ext cx="0" cy="0"/>
+          <a:chOff x="0" y="0"/>
+          <a:chExt cx="0" cy="0"/>
+        </a:xfrm>
+      </p:grpSpPr>
       <p:sp>
         <p:nvSpPr>
           <p:cNvPr id="2" name="TextBox 1"/>
@@ -6659,7 +6799,7 @@
               </a:defRPr>
             </a:pPr>
             <a:r>
-              <a:rPr b="1" sz="1500">
+              <a:rPr sz="1500" b="1">
                 <a:solidFill>
                   <a:srgbClr val="000000"/>
                 </a:solidFill>
@@ -6678,7 +6818,7 @@
               </a:defRPr>
             </a:pPr>
             <a:r>
-              <a:rPr b="1" sz="1400">
+              <a:rPr sz="1400" b="1">
                 <a:solidFill>
                   <a:srgbClr val="000000"/>
                 </a:solidFill>
@@ -6687,7 +6827,7 @@
               <a:t>  - Linear Spline Resampling: </a:t>
             </a:r>
             <a:r>
-              <a:rPr b="0" sz="1400">
+              <a:rPr sz="1400" b="0">
                 <a:solidFill>
                   <a:srgbClr val="1E1E1E"/>
                 </a:solidFill>
@@ -6706,7 +6846,7 @@
               </a:defRPr>
             </a:pPr>
             <a:r>
-              <a:rPr b="1" sz="1500">
+              <a:rPr sz="1500" b="1">
                 <a:solidFill>
                   <a:srgbClr val="000000"/>
                 </a:solidFill>
@@ -6725,7 +6865,7 @@
               </a:defRPr>
             </a:pPr>
             <a:r>
-              <a:rPr b="1" sz="1400">
+              <a:rPr sz="1400" b="1">
                 <a:solidFill>
                   <a:srgbClr val="000000"/>
                 </a:solidFill>
@@ -6734,7 +6874,7 @@
               <a:t>  - Vocabulary Mapping: </a:t>
             </a:r>
             <a:r>
-              <a:rPr b="0" sz="1400">
+              <a:rPr sz="1400" b="0">
                 <a:solidFill>
                   <a:srgbClr val="1E1E1E"/>
                 </a:solidFill>
@@ -6753,7 +6893,7 @@
               </a:defRPr>
             </a:pPr>
             <a:r>
-              <a:rPr b="1" sz="1400">
+              <a:rPr sz="1400" b="1">
                 <a:solidFill>
                   <a:srgbClr val="000000"/>
                 </a:solidFill>
@@ -6762,7 +6902,7 @@
               <a:t>  - One-Hot Vector Transformation: </a:t>
             </a:r>
             <a:r>
-              <a:rPr b="0" sz="1400">
+              <a:rPr sz="1400" b="0">
                 <a:solidFill>
                   <a:srgbClr val="1E1E1E"/>
                 </a:solidFill>
@@ -6781,7 +6921,7 @@
               </a:defRPr>
             </a:pPr>
             <a:r>
-              <a:rPr b="1" sz="1500">
+              <a:rPr sz="1500" b="1">
                 <a:solidFill>
                   <a:srgbClr val="000000"/>
                 </a:solidFill>
@@ -6800,7 +6940,7 @@
               </a:defRPr>
             </a:pPr>
             <a:r>
-              <a:rPr b="1" sz="1400">
+              <a:rPr sz="1400" b="1">
                 <a:solidFill>
                   <a:srgbClr val="000000"/>
                 </a:solidFill>
@@ -6809,7 +6949,7 @@
               <a:t>  - 1. Origin Translation: </a:t>
             </a:r>
             <a:r>
-              <a:rPr b="0" sz="1400">
+              <a:rPr sz="1400" b="0">
                 <a:solidFill>
                   <a:srgbClr val="1E1E1E"/>
                 </a:solidFill>
@@ -6828,7 +6968,7 @@
               </a:defRPr>
             </a:pPr>
             <a:r>
-              <a:rPr b="1" sz="1400">
+              <a:rPr sz="1400" b="1">
                 <a:solidFill>
                   <a:srgbClr val="000000"/>
                 </a:solidFill>
@@ -6837,7 +6977,7 @@
               <a:t>  - 2. Euclidean Scale Invariance: </a:t>
             </a:r>
             <a:r>
-              <a:rPr b="0" sz="1400">
+              <a:rPr sz="1400" b="0">
                 <a:solidFill>
                   <a:srgbClr val="1E1E1E"/>
                 </a:solidFill>
@@ -6857,7 +6997,7 @@
 </file>
 
 <file path=ppt/slides/slide6.xml><?xml version="1.0" encoding="utf-8"?>
-<p:sld xmlns:a="http://schemas.openxmlformats.org/drawingml/2006/main" xmlns:p="http://schemas.openxmlformats.org/presentationml/2006/main" xmlns:r="http://schemas.openxmlformats.org/officeDocument/2006/relationships">
+<p:sld xmlns:a="http://schemas.openxmlformats.org/drawingml/2006/main" xmlns:r="http://schemas.openxmlformats.org/officeDocument/2006/relationships" xmlns:p="http://schemas.openxmlformats.org/presentationml/2006/main">
   <p:cSld>
     <p:bg>
       <p:bgPr>
@@ -6873,7 +7013,14 @@
         <p:cNvGrpSpPr/>
         <p:nvPr/>
       </p:nvGrpSpPr>
-      <p:grpSpPr/>
+      <p:grpSpPr>
+        <a:xfrm>
+          <a:off x="0" y="0"/>
+          <a:ext cx="0" cy="0"/>
+          <a:chOff x="0" y="0"/>
+          <a:chExt cx="0" cy="0"/>
+        </a:xfrm>
+      </p:grpSpPr>
       <p:sp>
         <p:nvSpPr>
           <p:cNvPr id="2" name="TextBox 1"/>
@@ -6962,7 +7109,7 @@
               </a:defRPr>
             </a:pPr>
             <a:r>
-              <a:rPr b="1" sz="1300">
+              <a:rPr sz="1300" b="1">
                 <a:solidFill>
                   <a:srgbClr val="000000"/>
                 </a:solidFill>
@@ -6971,7 +7118,7 @@
               <a:t>• Input Stage: </a:t>
             </a:r>
             <a:r>
-              <a:rPr b="0" sz="1300">
+              <a:rPr sz="1300" b="0">
                 <a:solidFill>
                   <a:srgbClr val="1E1E1E"/>
                 </a:solidFill>
@@ -6990,7 +7137,7 @@
               </a:defRPr>
             </a:pPr>
             <a:r>
-              <a:rPr b="1" sz="1300">
+              <a:rPr sz="1300" b="1">
                 <a:solidFill>
                   <a:srgbClr val="000000"/>
                 </a:solidFill>
@@ -6999,7 +7146,7 @@
               <a:t>• Processing Stage: </a:t>
             </a:r>
             <a:r>
-              <a:rPr b="0" sz="1300">
+              <a:rPr sz="1300" b="0">
                 <a:solidFill>
                   <a:srgbClr val="1E1E1E"/>
                 </a:solidFill>
@@ -7018,7 +7165,7 @@
               </a:defRPr>
             </a:pPr>
             <a:r>
-              <a:rPr b="1" sz="1300">
+              <a:rPr sz="1300" b="1">
                 <a:solidFill>
                   <a:srgbClr val="000000"/>
                 </a:solidFill>
@@ -7027,7 +7174,7 @@
               <a:t>• Model &amp; Output Stage: </a:t>
             </a:r>
             <a:r>
-              <a:rPr b="0" sz="1300">
+              <a:rPr sz="1300" b="0">
                 <a:solidFill>
                   <a:srgbClr val="1E1E1E"/>
                 </a:solidFill>
@@ -7047,7 +7194,7 @@
 </file>
 
 <file path=ppt/slides/slide7.xml><?xml version="1.0" encoding="utf-8"?>
-<p:sld xmlns:a="http://schemas.openxmlformats.org/drawingml/2006/main" xmlns:p="http://schemas.openxmlformats.org/presentationml/2006/main" xmlns:r="http://schemas.openxmlformats.org/officeDocument/2006/relationships">
+<p:sld xmlns:a="http://schemas.openxmlformats.org/drawingml/2006/main" xmlns:r="http://schemas.openxmlformats.org/officeDocument/2006/relationships" xmlns:p="http://schemas.openxmlformats.org/presentationml/2006/main">
   <p:cSld>
     <p:bg>
       <p:bgPr>
@@ -7063,7 +7210,14 @@
         <p:cNvGrpSpPr/>
         <p:nvPr/>
       </p:nvGrpSpPr>
-      <p:grpSpPr/>
+      <p:grpSpPr>
+        <a:xfrm>
+          <a:off x="0" y="0"/>
+          <a:ext cx="0" cy="0"/>
+          <a:chOff x="0" y="0"/>
+          <a:chExt cx="0" cy="0"/>
+        </a:xfrm>
+      </p:grpSpPr>
       <p:sp>
         <p:nvSpPr>
           <p:cNvPr id="2" name="TextBox 1"/>
@@ -7131,7 +7285,7 @@
               </a:defRPr>
             </a:pPr>
             <a:r>
-              <a:rPr b="1" sz="1500">
+              <a:rPr sz="1500" b="1">
                 <a:solidFill>
                   <a:srgbClr val="000000"/>
                 </a:solidFill>
@@ -7150,7 +7304,7 @@
               </a:defRPr>
             </a:pPr>
             <a:r>
-              <a:rPr b="1" sz="1400">
+              <a:rPr sz="1400" b="1">
                 <a:solidFill>
                   <a:srgbClr val="000000"/>
                 </a:solidFill>
@@ -7159,7 +7313,7 @@
               <a:t>  - Primary Actors: </a:t>
             </a:r>
             <a:r>
-              <a:rPr b="0" sz="1400">
+              <a:rPr sz="1400" b="0">
                 <a:solidFill>
                   <a:srgbClr val="1E1E1E"/>
                 </a:solidFill>
@@ -7178,7 +7332,7 @@
               </a:defRPr>
             </a:pPr>
             <a:r>
-              <a:rPr b="1" sz="1350">
+              <a:rPr sz="1350" b="1">
                 <a:solidFill>
                   <a:srgbClr val="000000"/>
                 </a:solidFill>
@@ -7187,7 +7341,7 @@
               <a:t>  - Core Use Cases: </a:t>
             </a:r>
             <a:r>
-              <a:rPr b="0" sz="1350">
+              <a:rPr sz="1350" b="0">
                 <a:solidFill>
                   <a:srgbClr val="1E1E1E"/>
                 </a:solidFill>
@@ -7206,7 +7360,7 @@
               </a:defRPr>
             </a:pPr>
             <a:r>
-              <a:rPr b="1" sz="1500">
+              <a:rPr sz="1500" b="1">
                 <a:solidFill>
                   <a:srgbClr val="000000"/>
                 </a:solidFill>
@@ -7225,7 +7379,7 @@
               </a:defRPr>
             </a:pPr>
             <a:r>
-              <a:rPr b="1" sz="1350">
+              <a:rPr sz="1350" b="1">
                 <a:solidFill>
                   <a:srgbClr val="000000"/>
                 </a:solidFill>
@@ -7234,7 +7388,7 @@
               <a:t>  - Step 1 (Initialization): </a:t>
             </a:r>
             <a:r>
-              <a:rPr b="0" sz="1350">
+              <a:rPr sz="1350" b="0">
                 <a:solidFill>
                   <a:srgbClr val="1E1E1E"/>
                 </a:solidFill>
@@ -7253,7 +7407,7 @@
               </a:defRPr>
             </a:pPr>
             <a:r>
-              <a:rPr b="1" sz="1350">
+              <a:rPr sz="1350" b="1">
                 <a:solidFill>
                   <a:srgbClr val="000000"/>
                 </a:solidFill>
@@ -7262,7 +7416,7 @@
               <a:t>  - Step 2 (Perception): </a:t>
             </a:r>
             <a:r>
-              <a:rPr b="0" sz="1350">
+              <a:rPr sz="1350" b="0">
                 <a:solidFill>
                   <a:srgbClr val="1E1E1E"/>
                 </a:solidFill>
@@ -7281,7 +7435,7 @@
               </a:defRPr>
             </a:pPr>
             <a:r>
-              <a:rPr b="1" sz="1350">
+              <a:rPr sz="1350" b="1">
                 <a:solidFill>
                   <a:srgbClr val="000000"/>
                 </a:solidFill>
@@ -7290,7 +7444,7 @@
               <a:t>  - Step 3 (Inference &amp; Gate): </a:t>
             </a:r>
             <a:r>
-              <a:rPr b="0" sz="1350">
+              <a:rPr sz="1350" b="0">
                 <a:solidFill>
                   <a:srgbClr val="1E1E1E"/>
                 </a:solidFill>
@@ -7309,7 +7463,7 @@
               </a:defRPr>
             </a:pPr>
             <a:r>
-              <a:rPr b="1" sz="1350">
+              <a:rPr sz="1350" b="1">
                 <a:solidFill>
                   <a:srgbClr val="000000"/>
                 </a:solidFill>
@@ -7318,7 +7472,7 @@
               <a:t>  - Step 4 (Presentation): </a:t>
             </a:r>
             <a:r>
-              <a:rPr b="0" sz="1350">
+              <a:rPr sz="1350" b="0">
                 <a:solidFill>
                   <a:srgbClr val="1E1E1E"/>
                 </a:solidFill>
@@ -7338,7 +7492,7 @@
 </file>
 
 <file path=ppt/slides/slide8.xml><?xml version="1.0" encoding="utf-8"?>
-<p:sld xmlns:a="http://schemas.openxmlformats.org/drawingml/2006/main" xmlns:p="http://schemas.openxmlformats.org/presentationml/2006/main" xmlns:r="http://schemas.openxmlformats.org/officeDocument/2006/relationships">
+<p:sld xmlns:a="http://schemas.openxmlformats.org/drawingml/2006/main" xmlns:r="http://schemas.openxmlformats.org/officeDocument/2006/relationships" xmlns:p="http://schemas.openxmlformats.org/presentationml/2006/main">
   <p:cSld>
     <p:bg>
       <p:bgPr>
@@ -7354,7 +7508,14 @@
         <p:cNvGrpSpPr/>
         <p:nvPr/>
       </p:nvGrpSpPr>
-      <p:grpSpPr/>
+      <p:grpSpPr>
+        <a:xfrm>
+          <a:off x="0" y="0"/>
+          <a:ext cx="0" cy="0"/>
+          <a:chOff x="0" y="0"/>
+          <a:chExt cx="0" cy="0"/>
+        </a:xfrm>
+      </p:grpSpPr>
       <p:sp>
         <p:nvSpPr>
           <p:cNvPr id="2" name="TextBox 1"/>
@@ -7422,7 +7583,7 @@
               </a:defRPr>
             </a:pPr>
             <a:r>
-              <a:rPr b="1" sz="1500">
+              <a:rPr sz="1500" b="1">
                 <a:solidFill>
                   <a:srgbClr val="000000"/>
                 </a:solidFill>
@@ -7441,7 +7602,7 @@
               </a:defRPr>
             </a:pPr>
             <a:r>
-              <a:rPr b="1" sz="1400">
+              <a:rPr sz="1400" b="1">
                 <a:solidFill>
                   <a:srgbClr val="000000"/>
                 </a:solidFill>
@@ -7450,7 +7611,7 @@
               <a:t>  1. 1D Convolutional Neural Network (1D-CNN): </a:t>
             </a:r>
             <a:r>
-              <a:rPr b="0" sz="1400">
+              <a:rPr sz="1400" b="0">
                 <a:solidFill>
                   <a:srgbClr val="1E1E1E"/>
                 </a:solidFill>
@@ -7469,7 +7630,7 @@
               </a:defRPr>
             </a:pPr>
             <a:r>
-              <a:rPr b="1" sz="1400">
+              <a:rPr sz="1400" b="1">
                 <a:solidFill>
                   <a:srgbClr val="000000"/>
                 </a:solidFill>
@@ -7478,7 +7639,7 @@
               <a:t>  2. Unidirectional Gated Recurrent Unit (GRU): </a:t>
             </a:r>
             <a:r>
-              <a:rPr b="0" sz="1400">
+              <a:rPr sz="1400" b="0">
                 <a:solidFill>
                   <a:srgbClr val="1E1E1E"/>
                 </a:solidFill>
@@ -7497,7 +7658,7 @@
               </a:defRPr>
             </a:pPr>
             <a:r>
-              <a:rPr b="1" sz="1400">
+              <a:rPr sz="1400" b="1">
                 <a:solidFill>
                   <a:srgbClr val="000000"/>
                 </a:solidFill>
@@ -7506,7 +7667,7 @@
               <a:t>  3. Bidirectional LSTM (BiLSTM): </a:t>
             </a:r>
             <a:r>
-              <a:rPr b="0" sz="1400">
+              <a:rPr sz="1400" b="0">
                 <a:solidFill>
                   <a:srgbClr val="1E1E1E"/>
                 </a:solidFill>
@@ -7525,7 +7686,7 @@
               </a:defRPr>
             </a:pPr>
             <a:r>
-              <a:rPr b="1" sz="1400">
+              <a:rPr sz="1400" b="1">
                 <a:solidFill>
                   <a:srgbClr val="000000"/>
                 </a:solidFill>
@@ -7534,7 +7695,7 @@
               <a:t>  4. Spatial-Temporal Transformer: </a:t>
             </a:r>
             <a:r>
-              <a:rPr b="0" sz="1400">
+              <a:rPr sz="1400" b="0">
                 <a:solidFill>
                   <a:srgbClr val="1E1E1E"/>
                 </a:solidFill>
@@ -7553,7 +7714,7 @@
               </a:defRPr>
             </a:pPr>
             <a:r>
-              <a:rPr b="1" sz="1400">
+              <a:rPr sz="1400" b="1">
                 <a:solidFill>
                   <a:srgbClr val="000000"/>
                 </a:solidFill>
@@ -7562,7 +7723,7 @@
               <a:t>• Reason for Choosing BiLSTM as Phase-1 Baseline: </a:t>
             </a:r>
             <a:r>
-              <a:rPr b="0" sz="1400">
+              <a:rPr sz="1400" b="0">
                 <a:solidFill>
                   <a:srgbClr val="1E1E1E"/>
                 </a:solidFill>
@@ -7581,7 +7742,7 @@
               </a:defRPr>
             </a:pPr>
             <a:r>
-              <a:rPr b="1" sz="1400">
+              <a:rPr sz="1400" b="1">
                 <a:solidFill>
                   <a:srgbClr val="000000"/>
                 </a:solidFill>
@@ -7590,7 +7751,7 @@
               <a:t>• Baseline Model Architecture: </a:t>
             </a:r>
             <a:r>
-              <a:rPr b="0" sz="1400">
+              <a:rPr sz="1400" b="0">
                 <a:solidFill>
                   <a:srgbClr val="1E1E1E"/>
                 </a:solidFill>
@@ -7610,7 +7771,7 @@
 </file>
 
 <file path=ppt/slides/slide9.xml><?xml version="1.0" encoding="utf-8"?>
-<p:sld xmlns:a="http://schemas.openxmlformats.org/drawingml/2006/main" xmlns:p="http://schemas.openxmlformats.org/presentationml/2006/main" xmlns:r="http://schemas.openxmlformats.org/officeDocument/2006/relationships">
+<p:sld xmlns:a="http://schemas.openxmlformats.org/drawingml/2006/main" xmlns:r="http://schemas.openxmlformats.org/officeDocument/2006/relationships" xmlns:p="http://schemas.openxmlformats.org/presentationml/2006/main">
   <p:cSld>
     <p:bg>
       <p:bgPr>
@@ -7626,7 +7787,14 @@
         <p:cNvGrpSpPr/>
         <p:nvPr/>
       </p:nvGrpSpPr>
-      <p:grpSpPr/>
+      <p:grpSpPr>
+        <a:xfrm>
+          <a:off x="0" y="0"/>
+          <a:ext cx="0" cy="0"/>
+          <a:chOff x="0" y="0"/>
+          <a:chExt cx="0" cy="0"/>
+        </a:xfrm>
+      </p:grpSpPr>
       <p:sp>
         <p:nvSpPr>
           <p:cNvPr id="2" name="TextBox 1"/>
@@ -7694,7 +7862,7 @@
               </a:defRPr>
             </a:pPr>
             <a:r>
-              <a:rPr b="1" sz="1500">
+              <a:rPr sz="1500" b="1">
                 <a:solidFill>
                   <a:srgbClr val="000000"/>
                 </a:solidFill>
@@ -7713,7 +7881,7 @@
               </a:defRPr>
             </a:pPr>
             <a:r>
-              <a:rPr b="1" sz="1400">
+              <a:rPr sz="1400" b="1">
                 <a:solidFill>
                   <a:srgbClr val="000000"/>
                 </a:solidFill>
@@ -7722,7 +7890,7 @@
               <a:t>  - Upper Body Pose Skeleton: </a:t>
             </a:r>
             <a:r>
-              <a:rPr b="0" sz="1400">
+              <a:rPr sz="1400" b="0">
                 <a:solidFill>
                   <a:srgbClr val="1E1E1E"/>
                 </a:solidFill>
@@ -7741,7 +7909,7 @@
               </a:defRPr>
             </a:pPr>
             <a:r>
-              <a:rPr b="1" sz="1400">
+              <a:rPr sz="1400" b="1">
                 <a:solidFill>
                   <a:srgbClr val="000000"/>
                 </a:solidFill>
@@ -7750,7 +7918,7 @@
               <a:t>  - Left Hand Articulation: </a:t>
             </a:r>
             <a:r>
-              <a:rPr b="0" sz="1400">
+              <a:rPr sz="1400" b="0">
                 <a:solidFill>
                   <a:srgbClr val="1E1E1E"/>
                 </a:solidFill>
@@ -7769,7 +7937,7 @@
               </a:defRPr>
             </a:pPr>
             <a:r>
-              <a:rPr b="1" sz="1400">
+              <a:rPr sz="1400" b="1">
                 <a:solidFill>
                   <a:srgbClr val="000000"/>
                 </a:solidFill>
@@ -7778,7 +7946,7 @@
               <a:t>  - Right Hand Articulation: </a:t>
             </a:r>
             <a:r>
-              <a:rPr b="0" sz="1400">
+              <a:rPr sz="1400" b="0">
                 <a:solidFill>
                   <a:srgbClr val="1E1E1E"/>
                 </a:solidFill>
@@ -7797,7 +7965,7 @@
               </a:defRPr>
             </a:pPr>
             <a:r>
-              <a:rPr b="1" sz="1400">
+              <a:rPr sz="1400" b="1">
                 <a:solidFill>
                   <a:srgbClr val="000000"/>
                 </a:solidFill>
@@ -7806,7 +7974,7 @@
               <a:t>  - Lip Non-Manual Contours: </a:t>
             </a:r>
             <a:r>
-              <a:rPr b="0" sz="1400">
+              <a:rPr sz="1400" b="0">
                 <a:solidFill>
                   <a:srgbClr val="1E1E1E"/>
                 </a:solidFill>
@@ -7825,7 +7993,7 @@
               </a:defRPr>
             </a:pPr>
             <a:r>
-              <a:rPr b="1" sz="1500">
+              <a:rPr sz="1500" b="1">
                 <a:solidFill>
                   <a:srgbClr val="000000"/>
                 </a:solidFill>
@@ -7844,7 +8012,7 @@
               </a:defRPr>
             </a:pPr>
             <a:r>
-              <a:rPr b="1" sz="1400">
+              <a:rPr sz="1400" b="1">
                 <a:solidFill>
                   <a:srgbClr val="000000"/>
                 </a:solidFill>
@@ -7853,7 +8021,7 @@
               <a:t>  - 99.8% Dimensionality Reduction: </a:t>
             </a:r>
             <a:r>
-              <a:rPr b="0" sz="1400">
+              <a:rPr sz="1400" b="0">
                 <a:solidFill>
                   <a:srgbClr val="1E1E1E"/>
                 </a:solidFill>
@@ -7872,7 +8040,7 @@
               </a:defRPr>
             </a:pPr>
             <a:r>
-              <a:rPr b="1" sz="1400">
+              <a:rPr sz="1400" b="1">
                 <a:solidFill>
                   <a:srgbClr val="000000"/>
                 </a:solidFill>
@@ -7881,7 +8049,7 @@
               <a:t>  - Invariant to Appearance: </a:t>
             </a:r>
             <a:r>
-              <a:rPr b="0" sz="1400">
+              <a:rPr sz="1400" b="0">
                 <a:solidFill>
                   <a:srgbClr val="1E1E1E"/>
                 </a:solidFill>
@@ -7900,7 +8068,7 @@
               </a:defRPr>
             </a:pPr>
             <a:r>
-              <a:rPr b="1" sz="1400">
+              <a:rPr sz="1400" b="1">
                 <a:solidFill>
                   <a:srgbClr val="000000"/>
                 </a:solidFill>
@@ -7909,7 +8077,7 @@
               <a:t>• Domain Knowledge Applied: </a:t>
             </a:r>
             <a:r>
-              <a:rPr b="0" sz="1400">
+              <a:rPr sz="1400" b="0">
                 <a:solidFill>
                   <a:srgbClr val="1E1E1E"/>
                 </a:solidFill>
